--- a/courses/learn_floorplanning/module02-05-sequence-pair/slides.pptx
+++ b/courses/learn_floorplanning/module02-05-sequence-pair/slides.pptx
@@ -11,6 +11,10 @@
     <p:sldId id="259" r:id="rId11"/>
     <p:sldId id="260" r:id="rId12"/>
     <p:sldId id="261" r:id="rId13"/>
+    <p:sldId id="262" r:id="rId14"/>
+    <p:sldId id="263" r:id="rId15"/>
+    <p:sldId id="264" r:id="rId16"/>
+    <p:sldId id="265" r:id="rId17"/>
   </p:sldIdLst>
   <p:sldSz cx="12191695" cy="6858000" type="screen4x3"/>
   <p:notesSz cx="6858000" cy="9144000"/>
@@ -507,7 +511,83 @@
           <a:lstStyle/>
           <a:p>
             <a:r>
-              <a:t>A sequence pair is two permutations of the modules—often called the positive and negative sequences, Γ-plus and Γ-minus. Together they encode relative left-right and above-below order. From the pair you can pack coordinates with longest-path style constraints on a constraint graph.</a:t>
+              <a:t>Sequence pair uses positive permutation A B C E D and negative D A B C E. Longest-path packing from left-of and below constraints places all five modules legally.</a:t>
+            </a:r>
+          </a:p>
+          <a:p/>
+          <a:p>
+            <a:r>
+              <a:t>&lt;!-- algorithm-walkthrough --&gt;</a:t>
+            </a:r>
+          </a:p>
+        </p:txBody>
+      </p:sp>
+      <p:sp>
+        <p:nvSpPr>
+          <p:cNvPr id="4" name="Slide Number Placeholder 3"/>
+          <p:cNvSpPr>
+            <a:spLocks noGrp="1"/>
+          </p:cNvSpPr>
+          <p:nvPr>
+            <p:ph type="sldNum" idx="5" sz="quarter"/>
+          </p:nvPr>
+        </p:nvSpPr>
+        <p:spPr/>
+      </p:sp>
+    </p:spTree>
+  </p:cSld>
+  <p:clrMapOvr>
+    <a:masterClrMapping/>
+  </p:clrMapOvr>
+</p:notes>
+</file>
+
+<file path=ppt/notesSlides/notesSlide10.xml><?xml version="1.0" encoding="utf-8"?>
+<p:notes xmlns:a="http://schemas.openxmlformats.org/drawingml/2006/main" xmlns:p="http://schemas.openxmlformats.org/presentationml/2006/main" xmlns:r="http://schemas.openxmlformats.org/officeDocument/2006/relationships">
+  <p:cSld>
+    <p:spTree>
+      <p:nvGrpSpPr>
+        <p:cNvPr id="1" name=""/>
+        <p:cNvGrpSpPr/>
+        <p:nvPr/>
+      </p:nvGrpSpPr>
+      <p:grpSpPr>
+        <a:xfrm>
+          <a:off x="0" y="0"/>
+          <a:ext cx="0" cy="0"/>
+          <a:chOff x="0" y="0"/>
+          <a:chExt cx="0" cy="0"/>
+        </a:xfrm>
+      </p:grpSpPr>
+      <p:sp>
+        <p:nvSpPr>
+          <p:cNvPr id="2" name="Slide Image Placeholder 1"/>
+          <p:cNvSpPr>
+            <a:spLocks noGrp="1"/>
+          </p:cNvSpPr>
+          <p:nvPr>
+            <p:ph type="sldImg" idx="2"/>
+          </p:nvPr>
+        </p:nvSpPr>
+        <p:spPr/>
+      </p:sp>
+      <p:sp>
+        <p:nvSpPr>
+          <p:cNvPr id="3" name="Notes Placeholder 2"/>
+          <p:cNvSpPr>
+            <a:spLocks noGrp="1"/>
+          </p:cNvSpPr>
+          <p:nvPr>
+            <p:ph type="body" idx="3" sz="quarter"/>
+          </p:nvPr>
+        </p:nvSpPr>
+        <p:spPr/>
+        <p:txBody>
+          <a:bodyPr/>
+          <a:lstStyle/>
+          <a:p>
+            <a:r>
+              <a:t>Pack the golden sequences legally. Next: simulated annealing that prefers legal low-cost neighbors.</a:t>
             </a:r>
           </a:p>
         </p:txBody>
@@ -577,7 +657,7 @@
           <a:lstStyle/>
           <a:p>
             <a:r>
-              <a:t>If module A appears before B in both sequences, A is left of B. If A appears before B in Γ-plus but after B in Γ-minus, A is above B—under the standard Murata interpretation. Horizontal and vertical constraint graphs yield x and y via longest paths. Soft sizing and rotation can be layered on later; first get hard rectangles right.</a:t>
+              <a:t>Sequence pair uses a positive and a negative permutation of the same modules. Ours are pos A B C E D and neg D A B C E—five ids each, same set.</a:t>
             </a:r>
           </a:p>
         </p:txBody>
@@ -647,7 +727,7 @@
           <a:lstStyle/>
           <a:p>
             <a:r>
-              <a:t>Open **sequence-pair**. Load starter Γ-plus and Γ-minus. Highlight one pair of modules and read the implied relation—left-of or above. Pack and inspect deadspace under the fixed outline. Swap two symbols in one sequence and watch relations flip. Then implement packing from sequences in Track A.</a:t>
+              <a:t>Module i is left of j when i appears before j in both sequences. Longest-path packing pushes each block as far left as those constraints allow.</a:t>
             </a:r>
           </a:p>
         </p:txBody>
@@ -717,7 +797,7 @@
           <a:lstStyle/>
           <a:p>
             <a:r>
-              <a:t>Represent Γ-plus and Γ-minus as lists of module ids. Build constraint edges, compute coordinates, and check legality on the ten-by-eight outline. Report deadspace. Keep permutations as permutations—no duplicate ids. Deterministic packing helps goldens.</a:t>
+              <a:t>Module i is below j when i precedes j in pos but follows in neg. That fills y coordinates without overlaps for a feasible pair.</a:t>
             </a:r>
           </a:p>
         </p:txBody>
@@ -787,7 +867,7 @@
           <a:lstStyle/>
           <a:p>
             <a:r>
-              <a:t>Mixing up which sequence pair condition means “left of” versus “above” yields mirrored nonsense. Forgetting transitive longest-path compaction leaves unnecessary whitespace. And sequence pairs can encode non-slicing packings—don’t force a slicing tree interpretation onto them.</a:t>
+              <a:t>Evaluating the golden sequences places all five modules with non-negative coordinates and a legal packing inside the outline.</a:t>
             </a:r>
           </a:p>
         </p:txBody>
@@ -857,7 +937,223 @@
           <a:lstStyle/>
           <a:p>
             <a:r>
-              <a:t>Pack A–E from a sequence pair and verify legality. Next you’ll search the space of representations with simulated annealing.</a:t>
+              <a:t>Annealing on sequence pair swaps or rotates entries in pos and neg. Feasibility stays geometric; cost can be deadspace plus wirelength.</a:t>
+            </a:r>
+          </a:p>
+          <a:p/>
+          <a:p>
+            <a:r>
+              <a:t>&lt;!-- /algorithm-walkthrough --&gt;</a:t>
+            </a:r>
+          </a:p>
+        </p:txBody>
+      </p:sp>
+      <p:sp>
+        <p:nvSpPr>
+          <p:cNvPr id="4" name="Slide Number Placeholder 3"/>
+          <p:cNvSpPr>
+            <a:spLocks noGrp="1"/>
+          </p:cNvSpPr>
+          <p:nvPr>
+            <p:ph type="sldNum" idx="5" sz="quarter"/>
+          </p:nvPr>
+        </p:nvSpPr>
+        <p:spPr/>
+      </p:sp>
+    </p:spTree>
+  </p:cSld>
+  <p:clrMapOvr>
+    <a:masterClrMapping/>
+  </p:clrMapOvr>
+</p:notes>
+</file>
+
+<file path=ppt/notesSlides/notesSlide7.xml><?xml version="1.0" encoding="utf-8"?>
+<p:notes xmlns:a="http://schemas.openxmlformats.org/drawingml/2006/main" xmlns:p="http://schemas.openxmlformats.org/presentationml/2006/main" xmlns:r="http://schemas.openxmlformats.org/officeDocument/2006/relationships">
+  <p:cSld>
+    <p:spTree>
+      <p:nvGrpSpPr>
+        <p:cNvPr id="1" name=""/>
+        <p:cNvGrpSpPr/>
+        <p:nvPr/>
+      </p:nvGrpSpPr>
+      <p:grpSpPr>
+        <a:xfrm>
+          <a:off x="0" y="0"/>
+          <a:ext cx="0" cy="0"/>
+          <a:chOff x="0" y="0"/>
+          <a:chExt cx="0" cy="0"/>
+        </a:xfrm>
+      </p:grpSpPr>
+      <p:sp>
+        <p:nvSpPr>
+          <p:cNvPr id="2" name="Slide Image Placeholder 1"/>
+          <p:cNvSpPr>
+            <a:spLocks noGrp="1"/>
+          </p:cNvSpPr>
+          <p:nvPr>
+            <p:ph type="sldImg" idx="2"/>
+          </p:nvPr>
+        </p:nvSpPr>
+        <p:spPr/>
+      </p:sp>
+      <p:sp>
+        <p:nvSpPr>
+          <p:cNvPr id="3" name="Notes Placeholder 2"/>
+          <p:cNvSpPr>
+            <a:spLocks noGrp="1"/>
+          </p:cNvSpPr>
+          <p:nvPr>
+            <p:ph type="body" idx="3" sz="quarter"/>
+          </p:nvPr>
+        </p:nvSpPr>
+        <p:spPr/>
+        <p:txBody>
+          <a:bodyPr/>
+          <a:lstStyle/>
+          <a:p>
+            <a:r>
+              <a:t>Open sequence-pair and Pack sequence pair. Confirm five modules, non-negative coordinates, and legality true on the golden permutations.</a:t>
+            </a:r>
+          </a:p>
+        </p:txBody>
+      </p:sp>
+      <p:sp>
+        <p:nvSpPr>
+          <p:cNvPr id="4" name="Slide Number Placeholder 3"/>
+          <p:cNvSpPr>
+            <a:spLocks noGrp="1"/>
+          </p:cNvSpPr>
+          <p:nvPr>
+            <p:ph type="sldNum" idx="5" sz="quarter"/>
+          </p:nvPr>
+        </p:nvSpPr>
+        <p:spPr/>
+      </p:sp>
+    </p:spTree>
+  </p:cSld>
+  <p:clrMapOvr>
+    <a:masterClrMapping/>
+  </p:clrMapOvr>
+</p:notes>
+</file>
+
+<file path=ppt/notesSlides/notesSlide8.xml><?xml version="1.0" encoding="utf-8"?>
+<p:notes xmlns:a="http://schemas.openxmlformats.org/drawingml/2006/main" xmlns:p="http://schemas.openxmlformats.org/presentationml/2006/main" xmlns:r="http://schemas.openxmlformats.org/officeDocument/2006/relationships">
+  <p:cSld>
+    <p:spTree>
+      <p:nvGrpSpPr>
+        <p:cNvPr id="1" name=""/>
+        <p:cNvGrpSpPr/>
+        <p:nvPr/>
+      </p:nvGrpSpPr>
+      <p:grpSpPr>
+        <a:xfrm>
+          <a:off x="0" y="0"/>
+          <a:ext cx="0" cy="0"/>
+          <a:chOff x="0" y="0"/>
+          <a:chExt cx="0" cy="0"/>
+        </a:xfrm>
+      </p:grpSpPr>
+      <p:sp>
+        <p:nvSpPr>
+          <p:cNvPr id="2" name="Slide Image Placeholder 1"/>
+          <p:cNvSpPr>
+            <a:spLocks noGrp="1"/>
+          </p:cNvSpPr>
+          <p:nvPr>
+            <p:ph type="sldImg" idx="2"/>
+          </p:nvPr>
+        </p:nvSpPr>
+        <p:spPr/>
+      </p:sp>
+      <p:sp>
+        <p:nvSpPr>
+          <p:cNvPr id="3" name="Notes Placeholder 2"/>
+          <p:cNvSpPr>
+            <a:spLocks noGrp="1"/>
+          </p:cNvSpPr>
+          <p:nvPr>
+            <p:ph type="body" idx="3" sz="quarter"/>
+          </p:nvPr>
+        </p:nvSpPr>
+        <p:spPr/>
+        <p:txBody>
+          <a:bodyPr/>
+          <a:lstStyle/>
+          <a:p>
+            <a:r>
+              <a:t>Implement longest-path SP packing. Assert pos and neg are the same five ids, and the golden pair packs legally.</a:t>
+            </a:r>
+          </a:p>
+        </p:txBody>
+      </p:sp>
+      <p:sp>
+        <p:nvSpPr>
+          <p:cNvPr id="4" name="Slide Number Placeholder 3"/>
+          <p:cNvSpPr>
+            <a:spLocks noGrp="1"/>
+          </p:cNvSpPr>
+          <p:nvPr>
+            <p:ph type="sldNum" idx="5" sz="quarter"/>
+          </p:nvPr>
+        </p:nvSpPr>
+        <p:spPr/>
+      </p:sp>
+    </p:spTree>
+  </p:cSld>
+  <p:clrMapOvr>
+    <a:masterClrMapping/>
+  </p:clrMapOvr>
+</p:notes>
+</file>
+
+<file path=ppt/notesSlides/notesSlide9.xml><?xml version="1.0" encoding="utf-8"?>
+<p:notes xmlns:a="http://schemas.openxmlformats.org/drawingml/2006/main" xmlns:p="http://schemas.openxmlformats.org/presentationml/2006/main" xmlns:r="http://schemas.openxmlformats.org/officeDocument/2006/relationships">
+  <p:cSld>
+    <p:spTree>
+      <p:nvGrpSpPr>
+        <p:cNvPr id="1" name=""/>
+        <p:cNvGrpSpPr/>
+        <p:nvPr/>
+      </p:nvGrpSpPr>
+      <p:grpSpPr>
+        <a:xfrm>
+          <a:off x="0" y="0"/>
+          <a:ext cx="0" cy="0"/>
+          <a:chOff x="0" y="0"/>
+          <a:chExt cx="0" cy="0"/>
+        </a:xfrm>
+      </p:grpSpPr>
+      <p:sp>
+        <p:nvSpPr>
+          <p:cNvPr id="2" name="Slide Image Placeholder 1"/>
+          <p:cNvSpPr>
+            <a:spLocks noGrp="1"/>
+          </p:cNvSpPr>
+          <p:nvPr>
+            <p:ph type="sldImg" idx="2"/>
+          </p:nvPr>
+        </p:nvSpPr>
+        <p:spPr/>
+      </p:sp>
+      <p:sp>
+        <p:nvSpPr>
+          <p:cNvPr id="3" name="Notes Placeholder 2"/>
+          <p:cNvSpPr>
+            <a:spLocks noGrp="1"/>
+          </p:cNvSpPr>
+          <p:nvPr>
+            <p:ph type="body" idx="3" sz="quarter"/>
+          </p:nvPr>
+        </p:nvSpPr>
+        <p:spPr/>
+        <p:txBody>
+          <a:bodyPr/>
+          <a:lstStyle/>
+          <a:p>
+            <a:r>
+              <a:t>Mismatched id sets between pos and neg; swapping the horizontal/vertical rules; negative coordinates from a buggy DP.</a:t>
             </a:r>
           </a:p>
         </p:txBody>
@@ -3900,7 +4196,7 @@
                 </a:solidFill>
                 <a:latin typeface="Calibri"/>
               </a:rPr>
-              <a:t>Sequence pairs</a:t>
+              <a:t>Sequence-pair representation</a:t>
             </a:r>
           </a:p>
           <a:p>
@@ -3919,7 +4215,7 @@
                 </a:solidFill>
                 <a:latin typeface="Calibri"/>
               </a:rPr>
-              <a:t>A sequence pair is two permutations of the modules, often called the positive and negative sequences, Γ-plus and Γ-minus</a:t>
+              <a:t>Sequence pair uses positive permutation A B C E D and negative D A B C E</a:t>
             </a:r>
           </a:p>
         </p:txBody>
@@ -3927,6 +4223,169 @@
       <p:sp>
         <p:nvSpPr>
           <p:cNvPr id="3" name="TextBox 2"/>
+          <p:cNvSpPr txBox="1"/>
+          <p:nvPr/>
+        </p:nvSpPr>
+        <p:spPr>
+          <a:xfrm>
+            <a:off x="548640" y="6355080"/>
+            <a:ext cx="11064240" cy="320040"/>
+          </a:xfrm>
+          <a:prstGeom prst="rect">
+            <a:avLst/>
+          </a:prstGeom>
+          <a:noFill/>
+        </p:spPr>
+        <p:txBody>
+          <a:bodyPr wrap="square">
+            <a:noAutofit/>
+          </a:bodyPr>
+          <a:lstStyle/>
+          <a:p>
+            <a:pPr algn="r">
+              <a:lnSpc>
+                <a:spcPts val="2200"/>
+              </a:lnSpc>
+              <a:defRPr sz="1000" b="0">
+                <a:solidFill>
+                  <a:srgbClr val="666666"/>
+                </a:solidFill>
+                <a:latin typeface="Calibri"/>
+              </a:defRPr>
+            </a:pPr>
+            <a:r>
+              <a:t>learn_floorplanning — 05 sequence pair</a:t>
+            </a:r>
+          </a:p>
+        </p:txBody>
+      </p:sp>
+    </p:spTree>
+  </p:cSld>
+  <p:clrMapOvr>
+    <a:masterClrMapping/>
+  </p:clrMapOvr>
+</p:sld>
+</file>
+
+<file path=ppt/slides/slide10.xml><?xml version="1.0" encoding="utf-8"?>
+<p:sld xmlns:a="http://schemas.openxmlformats.org/drawingml/2006/main" xmlns:p="http://schemas.openxmlformats.org/presentationml/2006/main" xmlns:r="http://schemas.openxmlformats.org/officeDocument/2006/relationships">
+  <p:cSld>
+    <p:spTree>
+      <p:nvGrpSpPr>
+        <p:cNvPr id="1" name=""/>
+        <p:cNvGrpSpPr/>
+        <p:nvPr/>
+      </p:nvGrpSpPr>
+      <p:grpSpPr/>
+      <p:sp>
+        <p:nvSpPr>
+          <p:cNvPr id="2" name="TextBox 1"/>
+          <p:cNvSpPr txBox="1"/>
+          <p:nvPr/>
+        </p:nvSpPr>
+        <p:spPr>
+          <a:xfrm>
+            <a:off x="548640" y="411480"/>
+            <a:ext cx="11064240" cy="777240"/>
+          </a:xfrm>
+          <a:prstGeom prst="rect">
+            <a:avLst/>
+          </a:prstGeom>
+          <a:noFill/>
+        </p:spPr>
+        <p:txBody>
+          <a:bodyPr wrap="square">
+            <a:noAutofit/>
+          </a:bodyPr>
+          <a:lstStyle/>
+          <a:p>
+            <a:pPr>
+              <a:lnSpc>
+                <a:spcPts val="2200"/>
+              </a:lnSpc>
+            </a:pPr>
+            <a:r>
+              <a:rPr sz="2800" b="1">
+                <a:solidFill>
+                  <a:srgbClr val="1A1A2E"/>
+                </a:solidFill>
+                <a:latin typeface="Calibri"/>
+              </a:rPr>
+              <a:t>Your turn</a:t>
+            </a:r>
+          </a:p>
+        </p:txBody>
+      </p:sp>
+      <p:sp>
+        <p:nvSpPr>
+          <p:cNvPr id="3" name="TextBox 2"/>
+          <p:cNvSpPr txBox="1"/>
+          <p:nvPr/>
+        </p:nvSpPr>
+        <p:spPr>
+          <a:xfrm>
+            <a:off x="548640" y="1234440"/>
+            <a:ext cx="11064240" cy="4937760"/>
+          </a:xfrm>
+          <a:prstGeom prst="rect">
+            <a:avLst/>
+          </a:prstGeom>
+          <a:noFill/>
+        </p:spPr>
+        <p:txBody>
+          <a:bodyPr wrap="square">
+            <a:noAutofit/>
+          </a:bodyPr>
+          <a:lstStyle/>
+          <a:p>
+            <a:pPr lvl="0" marL="457200" indent="-228600">
+              <a:buFont typeface="Calibri"/>
+              <a:spcAft>
+                <a:spcPts val="1000"/>
+              </a:spcAft>
+              <a:buSzPct val="100000"/>
+              <a:buChar char="•"/>
+              <a:lnSpc>
+                <a:spcPts val="2200"/>
+              </a:lnSpc>
+            </a:pPr>
+            <a:r>
+              <a:rPr sz="2000" b="0">
+                <a:solidFill>
+                  <a:srgbClr val="333333"/>
+                </a:solidFill>
+                <a:latin typeface="Calibri"/>
+              </a:rPr>
+              <a:t>Pack the golden sequences legally</a:t>
+            </a:r>
+          </a:p>
+          <a:p>
+            <a:pPr lvl="0" marL="457200" indent="-228600">
+              <a:buFont typeface="Calibri"/>
+              <a:spcAft>
+                <a:spcPts val="1000"/>
+              </a:spcAft>
+              <a:buSzPct val="100000"/>
+              <a:buChar char="•"/>
+              <a:lnSpc>
+                <a:spcPts val="2200"/>
+              </a:lnSpc>
+            </a:pPr>
+            <a:r>
+              <a:rPr sz="2000" b="0">
+                <a:solidFill>
+                  <a:srgbClr val="333333"/>
+                </a:solidFill>
+                <a:latin typeface="Calibri"/>
+              </a:rPr>
+              <a:t>Next: simulated annealing that prefers legal low-cost neighbors</a:t>
+            </a:r>
+          </a:p>
+        </p:txBody>
+      </p:sp>
+      <p:sp>
+        <p:nvSpPr>
+          <p:cNvPr id="4" name="TextBox 3"/>
           <p:cNvSpPr txBox="1"/>
           <p:nvPr/>
         </p:nvSpPr>
@@ -4015,21 +4474,45 @@
                 </a:solidFill>
                 <a:latin typeface="Calibri"/>
               </a:rPr>
-              <a:t>The idea</a:t>
-            </a:r>
-          </a:p>
-        </p:txBody>
-      </p:sp>
-      <p:sp>
-        <p:nvSpPr>
-          <p:cNvPr id="3" name="TextBox 2"/>
+              <a:t>Two permutations encode geometry</a:t>
+            </a:r>
+          </a:p>
+        </p:txBody>
+      </p:sp>
+      <p:pic>
+        <p:nvPicPr>
+          <p:cNvPr id="3" name="Picture 2" descr="01-seqs.png"/>
+          <p:cNvPicPr>
+            <a:picLocks noChangeAspect="1"/>
+          </p:cNvPicPr>
+          <p:nvPr/>
+        </p:nvPicPr>
+        <p:blipFill>
+          <a:blip r:embed="rId2"/>
+          <a:stretch>
+            <a:fillRect/>
+          </a:stretch>
+        </p:blipFill>
+        <p:spPr>
+          <a:xfrm>
+            <a:off x="548640" y="1143000"/>
+            <a:ext cx="9424736" cy="4572000"/>
+          </a:xfrm>
+          <a:prstGeom prst="rect">
+            <a:avLst/>
+          </a:prstGeom>
+        </p:spPr>
+      </p:pic>
+      <p:sp>
+        <p:nvSpPr>
+          <p:cNvPr id="4" name="TextBox 3"/>
           <p:cNvSpPr txBox="1"/>
           <p:nvPr/>
         </p:nvSpPr>
         <p:spPr>
           <a:xfrm>
-            <a:off x="548640" y="1234440"/>
-            <a:ext cx="11064240" cy="4937760"/>
+            <a:off x="548640" y="5897880"/>
+            <a:ext cx="11064240" cy="411480"/>
           </a:xfrm>
           <a:prstGeom prst="rect">
             <a:avLst/>
@@ -4042,98 +4525,26 @@
           </a:bodyPr>
           <a:lstStyle/>
           <a:p>
-            <a:pPr lvl="0" marL="457200" indent="-228600">
-              <a:buFont typeface="Calibri"/>
-              <a:spcAft>
-                <a:spcPts val="1000"/>
-              </a:spcAft>
-              <a:buSzPct val="100000"/>
-              <a:buChar char="•"/>
+            <a:pPr>
               <a:lnSpc>
                 <a:spcPts val="2200"/>
               </a:lnSpc>
             </a:pPr>
             <a:r>
-              <a:rPr sz="2000" b="0">
+              <a:rPr sz="1200" b="0">
                 <a:solidFill>
                   <a:srgbClr val="333333"/>
                 </a:solidFill>
                 <a:latin typeface="Calibri"/>
               </a:rPr>
-              <a:t>If module A appears before B in both sequences, A is left of B</a:t>
-            </a:r>
-          </a:p>
-          <a:p>
-            <a:pPr lvl="0" marL="457200" indent="-228600">
-              <a:buFont typeface="Calibri"/>
-              <a:spcAft>
-                <a:spcPts val="1000"/>
-              </a:spcAft>
-              <a:buSzPct val="100000"/>
-              <a:buChar char="•"/>
-              <a:lnSpc>
-                <a:spcPts val="2200"/>
-              </a:lnSpc>
-            </a:pPr>
-            <a:r>
-              <a:rPr sz="2000" b="0">
-                <a:solidFill>
-                  <a:srgbClr val="333333"/>
-                </a:solidFill>
-                <a:latin typeface="Calibri"/>
-              </a:rPr>
-              <a:t>If A appears before B in Γ-plus but after B in Γ-minus</a:t>
-            </a:r>
-          </a:p>
-          <a:p>
-            <a:pPr lvl="0" marL="457200" indent="-228600">
-              <a:buFont typeface="Calibri"/>
-              <a:spcAft>
-                <a:spcPts val="1000"/>
-              </a:spcAft>
-              <a:buSzPct val="100000"/>
-              <a:buChar char="•"/>
-              <a:lnSpc>
-                <a:spcPts val="2200"/>
-              </a:lnSpc>
-            </a:pPr>
-            <a:r>
-              <a:rPr sz="2000" b="0">
-                <a:solidFill>
-                  <a:srgbClr val="333333"/>
-                </a:solidFill>
-                <a:latin typeface="Calibri"/>
-              </a:rPr>
-              <a:t>Horizontal and vertical constraint graphs yield x and y via longest paths</a:t>
-            </a:r>
-          </a:p>
-          <a:p>
-            <a:pPr lvl="0" marL="457200" indent="-228600">
-              <a:buFont typeface="Calibri"/>
-              <a:spcAft>
-                <a:spcPts val="1000"/>
-              </a:spcAft>
-              <a:buSzPct val="100000"/>
-              <a:buChar char="•"/>
-              <a:lnSpc>
-                <a:spcPts val="2200"/>
-              </a:lnSpc>
-            </a:pPr>
-            <a:r>
-              <a:rPr sz="2000" b="0">
-                <a:solidFill>
-                  <a:srgbClr val="333333"/>
-                </a:solidFill>
-                <a:latin typeface="Calibri"/>
-              </a:rPr>
-              <a:t>Soft sizing and rotation can be layered on later; first get hard rectangles right</a:t>
-            </a:r>
-          </a:p>
-        </p:txBody>
-      </p:sp>
-      <p:sp>
-        <p:nvSpPr>
-          <p:cNvPr id="4" name="TextBox 3"/>
+              <a:t>Two permutations encode geometry</a:t>
+            </a:r>
+          </a:p>
+        </p:txBody>
+      </p:sp>
+      <p:sp>
+        <p:nvSpPr>
+          <p:cNvPr id="5" name="TextBox 4"/>
           <p:cNvSpPr txBox="1"/>
           <p:nvPr/>
         </p:nvSpPr>
@@ -4222,21 +4633,45 @@
                 </a:solidFill>
                 <a:latin typeface="Calibri"/>
               </a:rPr>
-              <a:t>Browser lab track</a:t>
-            </a:r>
-          </a:p>
-        </p:txBody>
-      </p:sp>
-      <p:sp>
-        <p:nvSpPr>
-          <p:cNvPr id="3" name="TextBox 2"/>
+              <a:t>Horizontal constraints set x</a:t>
+            </a:r>
+          </a:p>
+        </p:txBody>
+      </p:sp>
+      <p:pic>
+        <p:nvPicPr>
+          <p:cNvPr id="3" name="Picture 2" descr="02-h-rules.png"/>
+          <p:cNvPicPr>
+            <a:picLocks noChangeAspect="1"/>
+          </p:cNvPicPr>
+          <p:nvPr/>
+        </p:nvPicPr>
+        <p:blipFill>
+          <a:blip r:embed="rId2"/>
+          <a:stretch>
+            <a:fillRect/>
+          </a:stretch>
+        </p:blipFill>
+        <p:spPr>
+          <a:xfrm>
+            <a:off x="548640" y="1143000"/>
+            <a:ext cx="9424736" cy="4572000"/>
+          </a:xfrm>
+          <a:prstGeom prst="rect">
+            <a:avLst/>
+          </a:prstGeom>
+        </p:spPr>
+      </p:pic>
+      <p:sp>
+        <p:nvSpPr>
+          <p:cNvPr id="4" name="TextBox 3"/>
           <p:cNvSpPr txBox="1"/>
           <p:nvPr/>
         </p:nvSpPr>
         <p:spPr>
           <a:xfrm>
-            <a:off x="548640" y="1234440"/>
-            <a:ext cx="11064240" cy="4937760"/>
+            <a:off x="548640" y="5897880"/>
+            <a:ext cx="11064240" cy="411480"/>
           </a:xfrm>
           <a:prstGeom prst="rect">
             <a:avLst/>
@@ -4249,151 +4684,26 @@
           </a:bodyPr>
           <a:lstStyle/>
           <a:p>
-            <a:pPr lvl="0" marL="457200" indent="-228600">
-              <a:buFont typeface="Calibri"/>
-              <a:spcAft>
-                <a:spcPts val="1000"/>
-              </a:spcAft>
-              <a:buSzPct val="100000"/>
-              <a:buChar char="•"/>
+            <a:pPr>
               <a:lnSpc>
                 <a:spcPts val="2200"/>
               </a:lnSpc>
             </a:pPr>
             <a:r>
-              <a:rPr sz="2000" b="0">
+              <a:rPr sz="1200" b="0">
                 <a:solidFill>
                   <a:srgbClr val="333333"/>
                 </a:solidFill>
                 <a:latin typeface="Calibri"/>
               </a:rPr>
-              <a:t>Open </a:t>
-            </a:r>
-            <a:r>
-              <a:rPr sz="2000" b="1">
-                <a:solidFill>
-                  <a:srgbClr val="333333"/>
-                </a:solidFill>
-                <a:latin typeface="Calibri"/>
-              </a:rPr>
-              <a:t>sequence-pair</a:t>
-            </a:r>
-          </a:p>
-          <a:p>
-            <a:pPr lvl="0" marL="457200" indent="-228600">
-              <a:buFont typeface="Calibri"/>
-              <a:spcAft>
-                <a:spcPts val="1000"/>
-              </a:spcAft>
-              <a:buSzPct val="100000"/>
-              <a:buChar char="•"/>
-              <a:lnSpc>
-                <a:spcPts val="2200"/>
-              </a:lnSpc>
-            </a:pPr>
-            <a:r>
-              <a:rPr sz="2000" b="0">
-                <a:solidFill>
-                  <a:srgbClr val="333333"/>
-                </a:solidFill>
-                <a:latin typeface="Calibri"/>
-              </a:rPr>
-              <a:t>Load starter Γ-plus and Γ-minus</a:t>
-            </a:r>
-          </a:p>
-          <a:p>
-            <a:pPr lvl="0" marL="457200" indent="-228600">
-              <a:buFont typeface="Calibri"/>
-              <a:spcAft>
-                <a:spcPts val="1000"/>
-              </a:spcAft>
-              <a:buSzPct val="100000"/>
-              <a:buChar char="•"/>
-              <a:lnSpc>
-                <a:spcPts val="2200"/>
-              </a:lnSpc>
-            </a:pPr>
-            <a:r>
-              <a:rPr sz="2000" b="0">
-                <a:solidFill>
-                  <a:srgbClr val="333333"/>
-                </a:solidFill>
-                <a:latin typeface="Calibri"/>
-              </a:rPr>
-              <a:t>Highlight one pair of modules and read the implied relation, left-of or above</a:t>
-            </a:r>
-          </a:p>
-          <a:p>
-            <a:pPr lvl="0" marL="457200" indent="-228600">
-              <a:buFont typeface="Calibri"/>
-              <a:spcAft>
-                <a:spcPts val="1000"/>
-              </a:spcAft>
-              <a:buSzPct val="100000"/>
-              <a:buChar char="•"/>
-              <a:lnSpc>
-                <a:spcPts val="2200"/>
-              </a:lnSpc>
-            </a:pPr>
-            <a:r>
-              <a:rPr sz="2000" b="0">
-                <a:solidFill>
-                  <a:srgbClr val="333333"/>
-                </a:solidFill>
-                <a:latin typeface="Calibri"/>
-              </a:rPr>
-              <a:t>Pack and inspect deadspace under the fixed outline</a:t>
-            </a:r>
-          </a:p>
-          <a:p>
-            <a:pPr lvl="0" marL="457200" indent="-228600">
-              <a:buFont typeface="Calibri"/>
-              <a:spcAft>
-                <a:spcPts val="1000"/>
-              </a:spcAft>
-              <a:buSzPct val="100000"/>
-              <a:buChar char="•"/>
-              <a:lnSpc>
-                <a:spcPts val="2200"/>
-              </a:lnSpc>
-            </a:pPr>
-            <a:r>
-              <a:rPr sz="2000" b="0">
-                <a:solidFill>
-                  <a:srgbClr val="333333"/>
-                </a:solidFill>
-                <a:latin typeface="Calibri"/>
-              </a:rPr>
-              <a:t>Swap two symbols in one sequence and watch relations flip</a:t>
-            </a:r>
-          </a:p>
-          <a:p>
-            <a:pPr lvl="0" marL="457200" indent="-228600">
-              <a:buFont typeface="Calibri"/>
-              <a:spcAft>
-                <a:spcPts val="1000"/>
-              </a:spcAft>
-              <a:buSzPct val="100000"/>
-              <a:buChar char="•"/>
-              <a:lnSpc>
-                <a:spcPts val="2200"/>
-              </a:lnSpc>
-            </a:pPr>
-            <a:r>
-              <a:rPr sz="2000" b="0">
-                <a:solidFill>
-                  <a:srgbClr val="333333"/>
-                </a:solidFill>
-                <a:latin typeface="Calibri"/>
-              </a:rPr>
-              <a:t>Then implement packing from sequences in Track A</a:t>
-            </a:r>
-          </a:p>
-        </p:txBody>
-      </p:sp>
-      <p:sp>
-        <p:nvSpPr>
-          <p:cNvPr id="4" name="TextBox 3"/>
+              <a:t>Horizontal constraints set x</a:t>
+            </a:r>
+          </a:p>
+        </p:txBody>
+      </p:sp>
+      <p:sp>
+        <p:nvSpPr>
+          <p:cNvPr id="5" name="TextBox 4"/>
           <p:cNvSpPr txBox="1"/>
           <p:nvPr/>
         </p:nvSpPr>
@@ -4482,21 +4792,45 @@
                 </a:solidFill>
                 <a:latin typeface="Calibri"/>
               </a:rPr>
-              <a:t>Implement track</a:t>
-            </a:r>
-          </a:p>
-        </p:txBody>
-      </p:sp>
-      <p:sp>
-        <p:nvSpPr>
-          <p:cNvPr id="3" name="TextBox 2"/>
+              <a:t>Vertical constraints set y</a:t>
+            </a:r>
+          </a:p>
+        </p:txBody>
+      </p:sp>
+      <p:pic>
+        <p:nvPicPr>
+          <p:cNvPr id="3" name="Picture 2" descr="03-v-rules.png"/>
+          <p:cNvPicPr>
+            <a:picLocks noChangeAspect="1"/>
+          </p:cNvPicPr>
+          <p:nvPr/>
+        </p:nvPicPr>
+        <p:blipFill>
+          <a:blip r:embed="rId2"/>
+          <a:stretch>
+            <a:fillRect/>
+          </a:stretch>
+        </p:blipFill>
+        <p:spPr>
+          <a:xfrm>
+            <a:off x="548640" y="1143000"/>
+            <a:ext cx="9424736" cy="4572000"/>
+          </a:xfrm>
+          <a:prstGeom prst="rect">
+            <a:avLst/>
+          </a:prstGeom>
+        </p:spPr>
+      </p:pic>
+      <p:sp>
+        <p:nvSpPr>
+          <p:cNvPr id="4" name="TextBox 3"/>
           <p:cNvSpPr txBox="1"/>
           <p:nvPr/>
         </p:nvSpPr>
         <p:spPr>
           <a:xfrm>
-            <a:off x="548640" y="1234440"/>
-            <a:ext cx="11064240" cy="4937760"/>
+            <a:off x="548640" y="5897880"/>
+            <a:ext cx="11064240" cy="411480"/>
           </a:xfrm>
           <a:prstGeom prst="rect">
             <a:avLst/>
@@ -4509,120 +4843,26 @@
           </a:bodyPr>
           <a:lstStyle/>
           <a:p>
-            <a:pPr lvl="0" marL="457200" indent="-228600">
-              <a:buFont typeface="Calibri"/>
-              <a:spcAft>
-                <a:spcPts val="1000"/>
-              </a:spcAft>
-              <a:buSzPct val="100000"/>
-              <a:buChar char="•"/>
+            <a:pPr>
               <a:lnSpc>
                 <a:spcPts val="2200"/>
               </a:lnSpc>
             </a:pPr>
             <a:r>
-              <a:rPr sz="2000" b="0">
+              <a:rPr sz="1200" b="0">
                 <a:solidFill>
                   <a:srgbClr val="333333"/>
                 </a:solidFill>
                 <a:latin typeface="Calibri"/>
               </a:rPr>
-              <a:t>Represent Γ-plus and Γ-minus as lists of module ids</a:t>
-            </a:r>
-          </a:p>
-          <a:p>
-            <a:pPr lvl="0" marL="457200" indent="-228600">
-              <a:buFont typeface="Calibri"/>
-              <a:spcAft>
-                <a:spcPts val="1000"/>
-              </a:spcAft>
-              <a:buSzPct val="100000"/>
-              <a:buChar char="•"/>
-              <a:lnSpc>
-                <a:spcPts val="2200"/>
-              </a:lnSpc>
-            </a:pPr>
-            <a:r>
-              <a:rPr sz="2000" b="0">
-                <a:solidFill>
-                  <a:srgbClr val="333333"/>
-                </a:solidFill>
-                <a:latin typeface="Calibri"/>
-              </a:rPr>
-              <a:t>Build constraint edges, compute coordinates</a:t>
-            </a:r>
-          </a:p>
-          <a:p>
-            <a:pPr lvl="0" marL="457200" indent="-228600">
-              <a:buFont typeface="Calibri"/>
-              <a:spcAft>
-                <a:spcPts val="1000"/>
-              </a:spcAft>
-              <a:buSzPct val="100000"/>
-              <a:buChar char="•"/>
-              <a:lnSpc>
-                <a:spcPts val="2200"/>
-              </a:lnSpc>
-            </a:pPr>
-            <a:r>
-              <a:rPr sz="2000" b="0">
-                <a:solidFill>
-                  <a:srgbClr val="333333"/>
-                </a:solidFill>
-                <a:latin typeface="Calibri"/>
-              </a:rPr>
-              <a:t>Report deadspace</a:t>
-            </a:r>
-          </a:p>
-          <a:p>
-            <a:pPr lvl="0" marL="457200" indent="-228600">
-              <a:buFont typeface="Calibri"/>
-              <a:spcAft>
-                <a:spcPts val="1000"/>
-              </a:spcAft>
-              <a:buSzPct val="100000"/>
-              <a:buChar char="•"/>
-              <a:lnSpc>
-                <a:spcPts val="2200"/>
-              </a:lnSpc>
-            </a:pPr>
-            <a:r>
-              <a:rPr sz="2000" b="0">
-                <a:solidFill>
-                  <a:srgbClr val="333333"/>
-                </a:solidFill>
-                <a:latin typeface="Calibri"/>
-              </a:rPr>
-              <a:t>Keep permutations as permutations, no duplicate ids</a:t>
-            </a:r>
-          </a:p>
-          <a:p>
-            <a:pPr lvl="0" marL="457200" indent="-228600">
-              <a:buFont typeface="Calibri"/>
-              <a:spcAft>
-                <a:spcPts val="1000"/>
-              </a:spcAft>
-              <a:buSzPct val="100000"/>
-              <a:buChar char="•"/>
-              <a:lnSpc>
-                <a:spcPts val="2200"/>
-              </a:lnSpc>
-            </a:pPr>
-            <a:r>
-              <a:rPr sz="2000" b="0">
-                <a:solidFill>
-                  <a:srgbClr val="333333"/>
-                </a:solidFill>
-                <a:latin typeface="Calibri"/>
-              </a:rPr>
-              <a:t>Deterministic packing helps goldens</a:t>
-            </a:r>
-          </a:p>
-        </p:txBody>
-      </p:sp>
-      <p:sp>
-        <p:nvSpPr>
-          <p:cNvPr id="4" name="TextBox 3"/>
+              <a:t>Vertical constraints set y</a:t>
+            </a:r>
+          </a:p>
+        </p:txBody>
+      </p:sp>
+      <p:sp>
+        <p:nvSpPr>
+          <p:cNvPr id="5" name="TextBox 4"/>
           <p:cNvSpPr txBox="1"/>
           <p:nvPr/>
         </p:nvSpPr>
@@ -4711,21 +4951,45 @@
                 </a:solidFill>
                 <a:latin typeface="Calibri"/>
               </a:rPr>
-              <a:t>Pitfalls</a:t>
-            </a:r>
-          </a:p>
-        </p:txBody>
-      </p:sp>
-      <p:sp>
-        <p:nvSpPr>
-          <p:cNvPr id="3" name="TextBox 2"/>
+              <a:t>Golden SP packs legally</a:t>
+            </a:r>
+          </a:p>
+        </p:txBody>
+      </p:sp>
+      <p:pic>
+        <p:nvPicPr>
+          <p:cNvPr id="3" name="Picture 2" descr="04-legal.png"/>
+          <p:cNvPicPr>
+            <a:picLocks noChangeAspect="1"/>
+          </p:cNvPicPr>
+          <p:nvPr/>
+        </p:nvPicPr>
+        <p:blipFill>
+          <a:blip r:embed="rId2"/>
+          <a:stretch>
+            <a:fillRect/>
+          </a:stretch>
+        </p:blipFill>
+        <p:spPr>
+          <a:xfrm>
+            <a:off x="548640" y="1143000"/>
+            <a:ext cx="9424736" cy="4572000"/>
+          </a:xfrm>
+          <a:prstGeom prst="rect">
+            <a:avLst/>
+          </a:prstGeom>
+        </p:spPr>
+      </p:pic>
+      <p:sp>
+        <p:nvSpPr>
+          <p:cNvPr id="4" name="TextBox 3"/>
           <p:cNvSpPr txBox="1"/>
           <p:nvPr/>
         </p:nvSpPr>
         <p:spPr>
           <a:xfrm>
-            <a:off x="548640" y="1234440"/>
-            <a:ext cx="11064240" cy="4937760"/>
+            <a:off x="548640" y="5897880"/>
+            <a:ext cx="11064240" cy="411480"/>
           </a:xfrm>
           <a:prstGeom prst="rect">
             <a:avLst/>
@@ -4738,76 +5002,26 @@
           </a:bodyPr>
           <a:lstStyle/>
           <a:p>
-            <a:pPr lvl="0" marL="457200" indent="-228600">
-              <a:buFont typeface="Calibri"/>
-              <a:spcAft>
-                <a:spcPts val="1000"/>
-              </a:spcAft>
-              <a:buSzPct val="100000"/>
-              <a:buChar char="•"/>
+            <a:pPr>
               <a:lnSpc>
                 <a:spcPts val="2200"/>
               </a:lnSpc>
             </a:pPr>
             <a:r>
-              <a:rPr sz="2000" b="0">
+              <a:rPr sz="1200" b="0">
                 <a:solidFill>
                   <a:srgbClr val="333333"/>
                 </a:solidFill>
                 <a:latin typeface="Calibri"/>
               </a:rPr>
-              <a:t>Mixing up which sequence pair condition means “left of” versus “above” yields mirrored</a:t>
-            </a:r>
-          </a:p>
-          <a:p>
-            <a:pPr lvl="0" marL="457200" indent="-228600">
-              <a:buFont typeface="Calibri"/>
-              <a:spcAft>
-                <a:spcPts val="1000"/>
-              </a:spcAft>
-              <a:buSzPct val="100000"/>
-              <a:buChar char="•"/>
-              <a:lnSpc>
-                <a:spcPts val="2200"/>
-              </a:lnSpc>
-            </a:pPr>
-            <a:r>
-              <a:rPr sz="2000" b="0">
-                <a:solidFill>
-                  <a:srgbClr val="333333"/>
-                </a:solidFill>
-                <a:latin typeface="Calibri"/>
-              </a:rPr>
-              <a:t>Forgetting transitive longest-path compaction leaves unnecessary whitespace</a:t>
-            </a:r>
-          </a:p>
-          <a:p>
-            <a:pPr lvl="0" marL="457200" indent="-228600">
-              <a:buFont typeface="Calibri"/>
-              <a:spcAft>
-                <a:spcPts val="1000"/>
-              </a:spcAft>
-              <a:buSzPct val="100000"/>
-              <a:buChar char="•"/>
-              <a:lnSpc>
-                <a:spcPts val="2200"/>
-              </a:lnSpc>
-            </a:pPr>
-            <a:r>
-              <a:rPr sz="2000" b="0">
-                <a:solidFill>
-                  <a:srgbClr val="333333"/>
-                </a:solidFill>
-                <a:latin typeface="Calibri"/>
-              </a:rPr>
-              <a:t>And sequence pairs can encode non-slicing packings</a:t>
-            </a:r>
-          </a:p>
-        </p:txBody>
-      </p:sp>
-      <p:sp>
-        <p:nvSpPr>
-          <p:cNvPr id="4" name="TextBox 3"/>
+              <a:t>Golden SP packs legally</a:t>
+            </a:r>
+          </a:p>
+        </p:txBody>
+      </p:sp>
+      <p:sp>
+        <p:nvSpPr>
+          <p:cNvPr id="5" name="TextBox 4"/>
           <p:cNvSpPr txBox="1"/>
           <p:nvPr/>
         </p:nvSpPr>
@@ -4896,7 +5110,166 @@
                 </a:solidFill>
                 <a:latin typeface="Calibri"/>
               </a:rPr>
-              <a:t>Your turn</a:t>
+              <a:t>SP neighbors are permutation moves</a:t>
+            </a:r>
+          </a:p>
+        </p:txBody>
+      </p:sp>
+      <p:pic>
+        <p:nvPicPr>
+          <p:cNvPr id="3" name="Picture 2" descr="05-takeaway.png"/>
+          <p:cNvPicPr>
+            <a:picLocks noChangeAspect="1"/>
+          </p:cNvPicPr>
+          <p:nvPr/>
+        </p:nvPicPr>
+        <p:blipFill>
+          <a:blip r:embed="rId2"/>
+          <a:stretch>
+            <a:fillRect/>
+          </a:stretch>
+        </p:blipFill>
+        <p:spPr>
+          <a:xfrm>
+            <a:off x="548640" y="1143000"/>
+            <a:ext cx="9424736" cy="4572000"/>
+          </a:xfrm>
+          <a:prstGeom prst="rect">
+            <a:avLst/>
+          </a:prstGeom>
+        </p:spPr>
+      </p:pic>
+      <p:sp>
+        <p:nvSpPr>
+          <p:cNvPr id="4" name="TextBox 3"/>
+          <p:cNvSpPr txBox="1"/>
+          <p:nvPr/>
+        </p:nvSpPr>
+        <p:spPr>
+          <a:xfrm>
+            <a:off x="548640" y="5897880"/>
+            <a:ext cx="11064240" cy="411480"/>
+          </a:xfrm>
+          <a:prstGeom prst="rect">
+            <a:avLst/>
+          </a:prstGeom>
+          <a:noFill/>
+        </p:spPr>
+        <p:txBody>
+          <a:bodyPr wrap="square">
+            <a:noAutofit/>
+          </a:bodyPr>
+          <a:lstStyle/>
+          <a:p>
+            <a:pPr>
+              <a:lnSpc>
+                <a:spcPts val="2200"/>
+              </a:lnSpc>
+            </a:pPr>
+            <a:r>
+              <a:rPr sz="1200" b="0">
+                <a:solidFill>
+                  <a:srgbClr val="333333"/>
+                </a:solidFill>
+                <a:latin typeface="Calibri"/>
+              </a:rPr>
+              <a:t>SP neighbors are permutation moves</a:t>
+            </a:r>
+          </a:p>
+        </p:txBody>
+      </p:sp>
+      <p:sp>
+        <p:nvSpPr>
+          <p:cNvPr id="5" name="TextBox 4"/>
+          <p:cNvSpPr txBox="1"/>
+          <p:nvPr/>
+        </p:nvSpPr>
+        <p:spPr>
+          <a:xfrm>
+            <a:off x="548640" y="6355080"/>
+            <a:ext cx="11064240" cy="320040"/>
+          </a:xfrm>
+          <a:prstGeom prst="rect">
+            <a:avLst/>
+          </a:prstGeom>
+          <a:noFill/>
+        </p:spPr>
+        <p:txBody>
+          <a:bodyPr wrap="square">
+            <a:noAutofit/>
+          </a:bodyPr>
+          <a:lstStyle/>
+          <a:p>
+            <a:pPr algn="r">
+              <a:lnSpc>
+                <a:spcPts val="2200"/>
+              </a:lnSpc>
+              <a:defRPr sz="1000" b="0">
+                <a:solidFill>
+                  <a:srgbClr val="666666"/>
+                </a:solidFill>
+                <a:latin typeface="Calibri"/>
+              </a:defRPr>
+            </a:pPr>
+            <a:r>
+              <a:t>learn_floorplanning — 05 sequence pair</a:t>
+            </a:r>
+          </a:p>
+        </p:txBody>
+      </p:sp>
+    </p:spTree>
+  </p:cSld>
+  <p:clrMapOvr>
+    <a:masterClrMapping/>
+  </p:clrMapOvr>
+</p:sld>
+</file>
+
+<file path=ppt/slides/slide7.xml><?xml version="1.0" encoding="utf-8"?>
+<p:sld xmlns:a="http://schemas.openxmlformats.org/drawingml/2006/main" xmlns:p="http://schemas.openxmlformats.org/presentationml/2006/main" xmlns:r="http://schemas.openxmlformats.org/officeDocument/2006/relationships">
+  <p:cSld>
+    <p:spTree>
+      <p:nvGrpSpPr>
+        <p:cNvPr id="1" name=""/>
+        <p:cNvGrpSpPr/>
+        <p:nvPr/>
+      </p:nvGrpSpPr>
+      <p:grpSpPr/>
+      <p:sp>
+        <p:nvSpPr>
+          <p:cNvPr id="2" name="TextBox 1"/>
+          <p:cNvSpPr txBox="1"/>
+          <p:nvPr/>
+        </p:nvSpPr>
+        <p:spPr>
+          <a:xfrm>
+            <a:off x="548640" y="411480"/>
+            <a:ext cx="11064240" cy="777240"/>
+          </a:xfrm>
+          <a:prstGeom prst="rect">
+            <a:avLst/>
+          </a:prstGeom>
+          <a:noFill/>
+        </p:spPr>
+        <p:txBody>
+          <a:bodyPr wrap="square">
+            <a:noAutofit/>
+          </a:bodyPr>
+          <a:lstStyle/>
+          <a:p>
+            <a:pPr>
+              <a:lnSpc>
+                <a:spcPts val="2200"/>
+              </a:lnSpc>
+            </a:pPr>
+            <a:r>
+              <a:rPr sz="2800" b="1">
+                <a:solidFill>
+                  <a:srgbClr val="1A1A2E"/>
+                </a:solidFill>
+                <a:latin typeface="Calibri"/>
+              </a:rPr>
+              <a:t>Browser lab track</a:t>
             </a:r>
           </a:p>
         </p:txBody>
@@ -4941,7 +5314,7 @@
                 </a:solidFill>
                 <a:latin typeface="Calibri"/>
               </a:rPr>
-              <a:t>Pack A–E from a sequence pair and verify legality</a:t>
+              <a:t>Open sequence-pair and Pack sequence pair</a:t>
             </a:r>
           </a:p>
           <a:p>
@@ -4963,7 +5336,311 @@
                 </a:solidFill>
                 <a:latin typeface="Calibri"/>
               </a:rPr>
-              <a:t>Next you’ll search the space of representations with simulated annealing</a:t>
+              <a:t>Confirm five modules, non-negative coordinates</a:t>
+            </a:r>
+          </a:p>
+        </p:txBody>
+      </p:sp>
+      <p:sp>
+        <p:nvSpPr>
+          <p:cNvPr id="4" name="TextBox 3"/>
+          <p:cNvSpPr txBox="1"/>
+          <p:nvPr/>
+        </p:nvSpPr>
+        <p:spPr>
+          <a:xfrm>
+            <a:off x="548640" y="6355080"/>
+            <a:ext cx="11064240" cy="320040"/>
+          </a:xfrm>
+          <a:prstGeom prst="rect">
+            <a:avLst/>
+          </a:prstGeom>
+          <a:noFill/>
+        </p:spPr>
+        <p:txBody>
+          <a:bodyPr wrap="square">
+            <a:noAutofit/>
+          </a:bodyPr>
+          <a:lstStyle/>
+          <a:p>
+            <a:pPr algn="r">
+              <a:lnSpc>
+                <a:spcPts val="2200"/>
+              </a:lnSpc>
+              <a:defRPr sz="1000" b="0">
+                <a:solidFill>
+                  <a:srgbClr val="666666"/>
+                </a:solidFill>
+                <a:latin typeface="Calibri"/>
+              </a:defRPr>
+            </a:pPr>
+            <a:r>
+              <a:t>learn_floorplanning — 05 sequence pair</a:t>
+            </a:r>
+          </a:p>
+        </p:txBody>
+      </p:sp>
+    </p:spTree>
+  </p:cSld>
+  <p:clrMapOvr>
+    <a:masterClrMapping/>
+  </p:clrMapOvr>
+</p:sld>
+</file>
+
+<file path=ppt/slides/slide8.xml><?xml version="1.0" encoding="utf-8"?>
+<p:sld xmlns:a="http://schemas.openxmlformats.org/drawingml/2006/main" xmlns:p="http://schemas.openxmlformats.org/presentationml/2006/main" xmlns:r="http://schemas.openxmlformats.org/officeDocument/2006/relationships">
+  <p:cSld>
+    <p:spTree>
+      <p:nvGrpSpPr>
+        <p:cNvPr id="1" name=""/>
+        <p:cNvGrpSpPr/>
+        <p:nvPr/>
+      </p:nvGrpSpPr>
+      <p:grpSpPr/>
+      <p:sp>
+        <p:nvSpPr>
+          <p:cNvPr id="2" name="TextBox 1"/>
+          <p:cNvSpPr txBox="1"/>
+          <p:nvPr/>
+        </p:nvSpPr>
+        <p:spPr>
+          <a:xfrm>
+            <a:off x="548640" y="411480"/>
+            <a:ext cx="11064240" cy="777240"/>
+          </a:xfrm>
+          <a:prstGeom prst="rect">
+            <a:avLst/>
+          </a:prstGeom>
+          <a:noFill/>
+        </p:spPr>
+        <p:txBody>
+          <a:bodyPr wrap="square">
+            <a:noAutofit/>
+          </a:bodyPr>
+          <a:lstStyle/>
+          <a:p>
+            <a:pPr>
+              <a:lnSpc>
+                <a:spcPts val="2200"/>
+              </a:lnSpc>
+            </a:pPr>
+            <a:r>
+              <a:rPr sz="2800" b="1">
+                <a:solidFill>
+                  <a:srgbClr val="1A1A2E"/>
+                </a:solidFill>
+                <a:latin typeface="Calibri"/>
+              </a:rPr>
+              <a:t>Implement track</a:t>
+            </a:r>
+          </a:p>
+        </p:txBody>
+      </p:sp>
+      <p:sp>
+        <p:nvSpPr>
+          <p:cNvPr id="3" name="TextBox 2"/>
+          <p:cNvSpPr txBox="1"/>
+          <p:nvPr/>
+        </p:nvSpPr>
+        <p:spPr>
+          <a:xfrm>
+            <a:off x="548640" y="1234440"/>
+            <a:ext cx="11064240" cy="4937760"/>
+          </a:xfrm>
+          <a:prstGeom prst="rect">
+            <a:avLst/>
+          </a:prstGeom>
+          <a:noFill/>
+        </p:spPr>
+        <p:txBody>
+          <a:bodyPr wrap="square">
+            <a:noAutofit/>
+          </a:bodyPr>
+          <a:lstStyle/>
+          <a:p>
+            <a:pPr lvl="0" marL="457200" indent="-228600">
+              <a:buFont typeface="Calibri"/>
+              <a:spcAft>
+                <a:spcPts val="1000"/>
+              </a:spcAft>
+              <a:buSzPct val="100000"/>
+              <a:buChar char="•"/>
+              <a:lnSpc>
+                <a:spcPts val="2200"/>
+              </a:lnSpc>
+            </a:pPr>
+            <a:r>
+              <a:rPr sz="2000" b="0">
+                <a:solidFill>
+                  <a:srgbClr val="333333"/>
+                </a:solidFill>
+                <a:latin typeface="Calibri"/>
+              </a:rPr>
+              <a:t>Implement longest-path SP packing</a:t>
+            </a:r>
+          </a:p>
+          <a:p>
+            <a:pPr lvl="0" marL="457200" indent="-228600">
+              <a:buFont typeface="Calibri"/>
+              <a:spcAft>
+                <a:spcPts val="1000"/>
+              </a:spcAft>
+              <a:buSzPct val="100000"/>
+              <a:buChar char="•"/>
+              <a:lnSpc>
+                <a:spcPts val="2200"/>
+              </a:lnSpc>
+            </a:pPr>
+            <a:r>
+              <a:rPr sz="2000" b="0">
+                <a:solidFill>
+                  <a:srgbClr val="333333"/>
+                </a:solidFill>
+                <a:latin typeface="Calibri"/>
+              </a:rPr>
+              <a:t>Assert pos and neg are the same five ids, and the golden pair packs legally</a:t>
+            </a:r>
+          </a:p>
+        </p:txBody>
+      </p:sp>
+      <p:sp>
+        <p:nvSpPr>
+          <p:cNvPr id="4" name="TextBox 3"/>
+          <p:cNvSpPr txBox="1"/>
+          <p:nvPr/>
+        </p:nvSpPr>
+        <p:spPr>
+          <a:xfrm>
+            <a:off x="548640" y="6355080"/>
+            <a:ext cx="11064240" cy="320040"/>
+          </a:xfrm>
+          <a:prstGeom prst="rect">
+            <a:avLst/>
+          </a:prstGeom>
+          <a:noFill/>
+        </p:spPr>
+        <p:txBody>
+          <a:bodyPr wrap="square">
+            <a:noAutofit/>
+          </a:bodyPr>
+          <a:lstStyle/>
+          <a:p>
+            <a:pPr algn="r">
+              <a:lnSpc>
+                <a:spcPts val="2200"/>
+              </a:lnSpc>
+              <a:defRPr sz="1000" b="0">
+                <a:solidFill>
+                  <a:srgbClr val="666666"/>
+                </a:solidFill>
+                <a:latin typeface="Calibri"/>
+              </a:defRPr>
+            </a:pPr>
+            <a:r>
+              <a:t>learn_floorplanning — 05 sequence pair</a:t>
+            </a:r>
+          </a:p>
+        </p:txBody>
+      </p:sp>
+    </p:spTree>
+  </p:cSld>
+  <p:clrMapOvr>
+    <a:masterClrMapping/>
+  </p:clrMapOvr>
+</p:sld>
+</file>
+
+<file path=ppt/slides/slide9.xml><?xml version="1.0" encoding="utf-8"?>
+<p:sld xmlns:a="http://schemas.openxmlformats.org/drawingml/2006/main" xmlns:p="http://schemas.openxmlformats.org/presentationml/2006/main" xmlns:r="http://schemas.openxmlformats.org/officeDocument/2006/relationships">
+  <p:cSld>
+    <p:spTree>
+      <p:nvGrpSpPr>
+        <p:cNvPr id="1" name=""/>
+        <p:cNvGrpSpPr/>
+        <p:nvPr/>
+      </p:nvGrpSpPr>
+      <p:grpSpPr/>
+      <p:sp>
+        <p:nvSpPr>
+          <p:cNvPr id="2" name="TextBox 1"/>
+          <p:cNvSpPr txBox="1"/>
+          <p:nvPr/>
+        </p:nvSpPr>
+        <p:spPr>
+          <a:xfrm>
+            <a:off x="548640" y="411480"/>
+            <a:ext cx="11064240" cy="777240"/>
+          </a:xfrm>
+          <a:prstGeom prst="rect">
+            <a:avLst/>
+          </a:prstGeom>
+          <a:noFill/>
+        </p:spPr>
+        <p:txBody>
+          <a:bodyPr wrap="square">
+            <a:noAutofit/>
+          </a:bodyPr>
+          <a:lstStyle/>
+          <a:p>
+            <a:pPr>
+              <a:lnSpc>
+                <a:spcPts val="2200"/>
+              </a:lnSpc>
+            </a:pPr>
+            <a:r>
+              <a:rPr sz="2800" b="1">
+                <a:solidFill>
+                  <a:srgbClr val="1A1A2E"/>
+                </a:solidFill>
+                <a:latin typeface="Calibri"/>
+              </a:rPr>
+              <a:t>Pitfalls</a:t>
+            </a:r>
+          </a:p>
+        </p:txBody>
+      </p:sp>
+      <p:sp>
+        <p:nvSpPr>
+          <p:cNvPr id="3" name="TextBox 2"/>
+          <p:cNvSpPr txBox="1"/>
+          <p:nvPr/>
+        </p:nvSpPr>
+        <p:spPr>
+          <a:xfrm>
+            <a:off x="548640" y="1234440"/>
+            <a:ext cx="11064240" cy="4937760"/>
+          </a:xfrm>
+          <a:prstGeom prst="rect">
+            <a:avLst/>
+          </a:prstGeom>
+          <a:noFill/>
+        </p:spPr>
+        <p:txBody>
+          <a:bodyPr wrap="square">
+            <a:noAutofit/>
+          </a:bodyPr>
+          <a:lstStyle/>
+          <a:p>
+            <a:pPr lvl="0" marL="457200" indent="-228600">
+              <a:buFont typeface="Calibri"/>
+              <a:spcAft>
+                <a:spcPts val="1000"/>
+              </a:spcAft>
+              <a:buSzPct val="100000"/>
+              <a:buChar char="•"/>
+              <a:lnSpc>
+                <a:spcPts val="2200"/>
+              </a:lnSpc>
+            </a:pPr>
+            <a:r>
+              <a:rPr sz="2000" b="0">
+                <a:solidFill>
+                  <a:srgbClr val="333333"/>
+                </a:solidFill>
+                <a:latin typeface="Calibri"/>
+              </a:rPr>
+              <a:t>Mismatched id sets between pos and neg</a:t>
             </a:r>
           </a:p>
         </p:txBody>

--- a/courses/learn_floorplanning/module02-05-sequence-pair/slides.pptx
+++ b/courses/learn_floorplanning/module02-05-sequence-pair/slides.pptx
@@ -15,6 +15,9 @@
     <p:sldId id="263" r:id="rId15"/>
     <p:sldId id="264" r:id="rId16"/>
     <p:sldId id="265" r:id="rId17"/>
+    <p:sldId id="266" r:id="rId18"/>
+    <p:sldId id="267" r:id="rId19"/>
+    <p:sldId id="268" r:id="rId20"/>
   </p:sldIdLst>
   <p:sldSz cx="12191695" cy="6858000" type="screen4x3"/>
   <p:notesSz cx="6858000" cy="9144000"/>
@@ -514,12 +517,6 @@
               <a:t>Sequence pair uses positive permutation A B C E D and negative D A B C E. Longest-path packing from left-of and below constraints places all five modules legally.</a:t>
             </a:r>
           </a:p>
-          <a:p/>
-          <a:p>
-            <a:r>
-              <a:t>&lt;!-- algorithm-walkthrough --&gt;</a:t>
-            </a:r>
-          </a:p>
         </p:txBody>
       </p:sp>
       <p:sp>
@@ -587,6 +584,146 @@
           <a:lstStyle/>
           <a:p>
             <a:r>
+              <a:t>Implement longest-path SP packing. Assert pos and neg are the same five ids, and the golden pair packs legally.</a:t>
+            </a:r>
+          </a:p>
+        </p:txBody>
+      </p:sp>
+      <p:sp>
+        <p:nvSpPr>
+          <p:cNvPr id="4" name="Slide Number Placeholder 3"/>
+          <p:cNvSpPr>
+            <a:spLocks noGrp="1"/>
+          </p:cNvSpPr>
+          <p:nvPr>
+            <p:ph type="sldNum" idx="5" sz="quarter"/>
+          </p:nvPr>
+        </p:nvSpPr>
+        <p:spPr/>
+      </p:sp>
+    </p:spTree>
+  </p:cSld>
+  <p:clrMapOvr>
+    <a:masterClrMapping/>
+  </p:clrMapOvr>
+</p:notes>
+</file>
+
+<file path=ppt/notesSlides/notesSlide11.xml><?xml version="1.0" encoding="utf-8"?>
+<p:notes xmlns:a="http://schemas.openxmlformats.org/drawingml/2006/main" xmlns:p="http://schemas.openxmlformats.org/presentationml/2006/main" xmlns:r="http://schemas.openxmlformats.org/officeDocument/2006/relationships">
+  <p:cSld>
+    <p:spTree>
+      <p:nvGrpSpPr>
+        <p:cNvPr id="1" name=""/>
+        <p:cNvGrpSpPr/>
+        <p:nvPr/>
+      </p:nvGrpSpPr>
+      <p:grpSpPr>
+        <a:xfrm>
+          <a:off x="0" y="0"/>
+          <a:ext cx="0" cy="0"/>
+          <a:chOff x="0" y="0"/>
+          <a:chExt cx="0" cy="0"/>
+        </a:xfrm>
+      </p:grpSpPr>
+      <p:sp>
+        <p:nvSpPr>
+          <p:cNvPr id="2" name="Slide Image Placeholder 1"/>
+          <p:cNvSpPr>
+            <a:spLocks noGrp="1"/>
+          </p:cNvSpPr>
+          <p:nvPr>
+            <p:ph type="sldImg" idx="2"/>
+          </p:nvPr>
+        </p:nvSpPr>
+        <p:spPr/>
+      </p:sp>
+      <p:sp>
+        <p:nvSpPr>
+          <p:cNvPr id="3" name="Notes Placeholder 2"/>
+          <p:cNvSpPr>
+            <a:spLocks noGrp="1"/>
+          </p:cNvSpPr>
+          <p:nvPr>
+            <p:ph type="body" idx="3" sz="quarter"/>
+          </p:nvPr>
+        </p:nvSpPr>
+        <p:spPr/>
+        <p:txBody>
+          <a:bodyPr/>
+          <a:lstStyle/>
+          <a:p>
+            <a:r>
+              <a:t>Mismatched id sets between pos and neg; swapping the horizontal/vertical rules; negative coordinates from a buggy DP.</a:t>
+            </a:r>
+          </a:p>
+        </p:txBody>
+      </p:sp>
+      <p:sp>
+        <p:nvSpPr>
+          <p:cNvPr id="4" name="Slide Number Placeholder 3"/>
+          <p:cNvSpPr>
+            <a:spLocks noGrp="1"/>
+          </p:cNvSpPr>
+          <p:nvPr>
+            <p:ph type="sldNum" idx="5" sz="quarter"/>
+          </p:nvPr>
+        </p:nvSpPr>
+        <p:spPr/>
+      </p:sp>
+    </p:spTree>
+  </p:cSld>
+  <p:clrMapOvr>
+    <a:masterClrMapping/>
+  </p:clrMapOvr>
+</p:notes>
+</file>
+
+<file path=ppt/notesSlides/notesSlide12.xml><?xml version="1.0" encoding="utf-8"?>
+<p:notes xmlns:a="http://schemas.openxmlformats.org/drawingml/2006/main" xmlns:p="http://schemas.openxmlformats.org/presentationml/2006/main" xmlns:r="http://schemas.openxmlformats.org/officeDocument/2006/relationships">
+  <p:cSld>
+    <p:spTree>
+      <p:nvGrpSpPr>
+        <p:cNvPr id="1" name=""/>
+        <p:cNvGrpSpPr/>
+        <p:nvPr/>
+      </p:nvGrpSpPr>
+      <p:grpSpPr>
+        <a:xfrm>
+          <a:off x="0" y="0"/>
+          <a:ext cx="0" cy="0"/>
+          <a:chOff x="0" y="0"/>
+          <a:chExt cx="0" cy="0"/>
+        </a:xfrm>
+      </p:grpSpPr>
+      <p:sp>
+        <p:nvSpPr>
+          <p:cNvPr id="2" name="Slide Image Placeholder 1"/>
+          <p:cNvSpPr>
+            <a:spLocks noGrp="1"/>
+          </p:cNvSpPr>
+          <p:nvPr>
+            <p:ph type="sldImg" idx="2"/>
+          </p:nvPr>
+        </p:nvSpPr>
+        <p:spPr/>
+      </p:sp>
+      <p:sp>
+        <p:nvSpPr>
+          <p:cNvPr id="3" name="Notes Placeholder 2"/>
+          <p:cNvSpPr>
+            <a:spLocks noGrp="1"/>
+          </p:cNvSpPr>
+          <p:nvPr>
+            <p:ph type="body" idx="3" sz="quarter"/>
+          </p:nvPr>
+        </p:nvSpPr>
+        <p:spPr/>
+        <p:txBody>
+          <a:bodyPr/>
+          <a:lstStyle/>
+          <a:p>
+            <a:r>
               <a:t>Pack the golden sequences legally. Next: simulated annealing that prefers legal low-cost neighbors.</a:t>
             </a:r>
           </a:p>
@@ -657,7 +794,13 @@
           <a:lstStyle/>
           <a:p>
             <a:r>
-              <a:t>Sequence pair uses a positive and a negative permutation of the same modules. Ours are pos A B C E D and neg D A B C E—five ids each, same set.</a:t>
+              <a:t>Sequence-pair pseudocode turns two permutations into horizontal and vertical constraints, then longest-path packs x and y.</a:t>
+            </a:r>
+          </a:p>
+          <a:p/>
+          <a:p>
+            <a:r>
+              <a:t>Open this module's examples file and find the Pseudocode section. That written sketch is what you implement on the implement track and what the browser challenges measure.</a:t>
             </a:r>
           </a:p>
         </p:txBody>
@@ -727,7 +870,7 @@
           <a:lstStyle/>
           <a:p>
             <a:r>
-              <a:t>Module i is left of j when i appears before j in both sequences. Longest-path packing pushes each block as far left as those constraints allow.</a:t>
+              <a:t>Golden pos is A B C E D and neg is D A B C E. Evaluation must place all five modules legally with non-negative coordinates.</a:t>
             </a:r>
           </a:p>
         </p:txBody>
@@ -797,7 +940,7 @@
           <a:lstStyle/>
           <a:p>
             <a:r>
-              <a:t>Module i is below j when i precedes j in pos but follows in neg. That fills y coordinates without overlaps for a feasible pair.</a:t>
+              <a:t>Sequence pair uses a positive and a negative permutation of the same modules. Ours are pos A B C E D and neg D A B C E—five ids each, same set.</a:t>
             </a:r>
           </a:p>
         </p:txBody>
@@ -867,7 +1010,7 @@
           <a:lstStyle/>
           <a:p>
             <a:r>
-              <a:t>Evaluating the golden sequences places all five modules with non-negative coordinates and a legal packing inside the outline.</a:t>
+              <a:t>Module i is left of j when i appears before j in both sequences. Longest-path packing pushes each block as far left as those constraints allow.</a:t>
             </a:r>
           </a:p>
         </p:txBody>
@@ -937,13 +1080,7 @@
           <a:lstStyle/>
           <a:p>
             <a:r>
-              <a:t>Annealing on sequence pair swaps or rotates entries in pos and neg. Feasibility stays geometric; cost can be deadspace plus wirelength.</a:t>
-            </a:r>
-          </a:p>
-          <a:p/>
-          <a:p>
-            <a:r>
-              <a:t>&lt;!-- /algorithm-walkthrough --&gt;</a:t>
+              <a:t>Module i is below j when i precedes j in pos but follows in neg. That fills y coordinates without overlaps for a feasible pair.</a:t>
             </a:r>
           </a:p>
         </p:txBody>
@@ -1013,7 +1150,7 @@
           <a:lstStyle/>
           <a:p>
             <a:r>
-              <a:t>Open sequence-pair and Pack sequence pair. Confirm five modules, non-negative coordinates, and legality true on the golden permutations.</a:t>
+              <a:t>Evaluating the golden sequences places all five modules with non-negative coordinates and a legal packing inside the outline.</a:t>
             </a:r>
           </a:p>
         </p:txBody>
@@ -1083,7 +1220,7 @@
           <a:lstStyle/>
           <a:p>
             <a:r>
-              <a:t>Implement longest-path SP packing. Assert pos and neg are the same five ids, and the golden pair packs legally.</a:t>
+              <a:t>Annealing on sequence pair swaps or rotates entries in pos and neg. Feasibility stays geometric; cost can be deadspace plus wirelength.</a:t>
             </a:r>
           </a:p>
         </p:txBody>
@@ -1153,7 +1290,7 @@
           <a:lstStyle/>
           <a:p>
             <a:r>
-              <a:t>Mismatched id sets between pos and neg; swapping the horizontal/vertical rules; negative coordinates from a buggy DP.</a:t>
+              <a:t>Open sequence-pair and Pack sequence pair. Confirm five modules, non-negative coordinates, and legality true on the golden permutations.</a:t>
             </a:r>
           </a:p>
         </p:txBody>
@@ -4311,6 +4448,473 @@
                 </a:solidFill>
                 <a:latin typeface="Calibri"/>
               </a:rPr>
+              <a:t>Browser lab track</a:t>
+            </a:r>
+          </a:p>
+        </p:txBody>
+      </p:sp>
+      <p:sp>
+        <p:nvSpPr>
+          <p:cNvPr id="3" name="TextBox 2"/>
+          <p:cNvSpPr txBox="1"/>
+          <p:nvPr/>
+        </p:nvSpPr>
+        <p:spPr>
+          <a:xfrm>
+            <a:off x="548640" y="1234440"/>
+            <a:ext cx="11064240" cy="4937760"/>
+          </a:xfrm>
+          <a:prstGeom prst="rect">
+            <a:avLst/>
+          </a:prstGeom>
+          <a:noFill/>
+        </p:spPr>
+        <p:txBody>
+          <a:bodyPr wrap="square">
+            <a:noAutofit/>
+          </a:bodyPr>
+          <a:lstStyle/>
+          <a:p>
+            <a:pPr lvl="0" marL="457200" indent="-228600">
+              <a:buFont typeface="Calibri"/>
+              <a:spcAft>
+                <a:spcPts val="1000"/>
+              </a:spcAft>
+              <a:buSzPct val="100000"/>
+              <a:buChar char="•"/>
+              <a:lnSpc>
+                <a:spcPts val="2200"/>
+              </a:lnSpc>
+            </a:pPr>
+            <a:r>
+              <a:rPr sz="2000" b="0">
+                <a:solidFill>
+                  <a:srgbClr val="333333"/>
+                </a:solidFill>
+                <a:latin typeface="Calibri"/>
+              </a:rPr>
+              <a:t>Open sequence-pair and Pack sequence pair</a:t>
+            </a:r>
+          </a:p>
+          <a:p>
+            <a:pPr lvl="0" marL="457200" indent="-228600">
+              <a:buFont typeface="Calibri"/>
+              <a:spcAft>
+                <a:spcPts val="1000"/>
+              </a:spcAft>
+              <a:buSzPct val="100000"/>
+              <a:buChar char="•"/>
+              <a:lnSpc>
+                <a:spcPts val="2200"/>
+              </a:lnSpc>
+            </a:pPr>
+            <a:r>
+              <a:rPr sz="2000" b="0">
+                <a:solidFill>
+                  <a:srgbClr val="333333"/>
+                </a:solidFill>
+                <a:latin typeface="Calibri"/>
+              </a:rPr>
+              <a:t>Confirm five modules, non-negative coordinates</a:t>
+            </a:r>
+          </a:p>
+        </p:txBody>
+      </p:sp>
+      <p:sp>
+        <p:nvSpPr>
+          <p:cNvPr id="4" name="TextBox 3"/>
+          <p:cNvSpPr txBox="1"/>
+          <p:nvPr/>
+        </p:nvSpPr>
+        <p:spPr>
+          <a:xfrm>
+            <a:off x="548640" y="6355080"/>
+            <a:ext cx="11064240" cy="320040"/>
+          </a:xfrm>
+          <a:prstGeom prst="rect">
+            <a:avLst/>
+          </a:prstGeom>
+          <a:noFill/>
+        </p:spPr>
+        <p:txBody>
+          <a:bodyPr wrap="square">
+            <a:noAutofit/>
+          </a:bodyPr>
+          <a:lstStyle/>
+          <a:p>
+            <a:pPr algn="r">
+              <a:lnSpc>
+                <a:spcPts val="2200"/>
+              </a:lnSpc>
+              <a:defRPr sz="1000" b="0">
+                <a:solidFill>
+                  <a:srgbClr val="666666"/>
+                </a:solidFill>
+                <a:latin typeface="Calibri"/>
+              </a:defRPr>
+            </a:pPr>
+            <a:r>
+              <a:t>learn_floorplanning — 05 sequence pair</a:t>
+            </a:r>
+          </a:p>
+        </p:txBody>
+      </p:sp>
+    </p:spTree>
+  </p:cSld>
+  <p:clrMapOvr>
+    <a:masterClrMapping/>
+  </p:clrMapOvr>
+</p:sld>
+</file>
+
+<file path=ppt/slides/slide11.xml><?xml version="1.0" encoding="utf-8"?>
+<p:sld xmlns:a="http://schemas.openxmlformats.org/drawingml/2006/main" xmlns:p="http://schemas.openxmlformats.org/presentationml/2006/main" xmlns:r="http://schemas.openxmlformats.org/officeDocument/2006/relationships">
+  <p:cSld>
+    <p:spTree>
+      <p:nvGrpSpPr>
+        <p:cNvPr id="1" name=""/>
+        <p:cNvGrpSpPr/>
+        <p:nvPr/>
+      </p:nvGrpSpPr>
+      <p:grpSpPr/>
+      <p:sp>
+        <p:nvSpPr>
+          <p:cNvPr id="2" name="TextBox 1"/>
+          <p:cNvSpPr txBox="1"/>
+          <p:nvPr/>
+        </p:nvSpPr>
+        <p:spPr>
+          <a:xfrm>
+            <a:off x="548640" y="411480"/>
+            <a:ext cx="11064240" cy="777240"/>
+          </a:xfrm>
+          <a:prstGeom prst="rect">
+            <a:avLst/>
+          </a:prstGeom>
+          <a:noFill/>
+        </p:spPr>
+        <p:txBody>
+          <a:bodyPr wrap="square">
+            <a:noAutofit/>
+          </a:bodyPr>
+          <a:lstStyle/>
+          <a:p>
+            <a:pPr>
+              <a:lnSpc>
+                <a:spcPts val="2200"/>
+              </a:lnSpc>
+            </a:pPr>
+            <a:r>
+              <a:rPr sz="2800" b="1">
+                <a:solidFill>
+                  <a:srgbClr val="1A1A2E"/>
+                </a:solidFill>
+                <a:latin typeface="Calibri"/>
+              </a:rPr>
+              <a:t>Implement track</a:t>
+            </a:r>
+          </a:p>
+        </p:txBody>
+      </p:sp>
+      <p:sp>
+        <p:nvSpPr>
+          <p:cNvPr id="3" name="TextBox 2"/>
+          <p:cNvSpPr txBox="1"/>
+          <p:nvPr/>
+        </p:nvSpPr>
+        <p:spPr>
+          <a:xfrm>
+            <a:off x="548640" y="1234440"/>
+            <a:ext cx="11064240" cy="4937760"/>
+          </a:xfrm>
+          <a:prstGeom prst="rect">
+            <a:avLst/>
+          </a:prstGeom>
+          <a:noFill/>
+        </p:spPr>
+        <p:txBody>
+          <a:bodyPr wrap="square">
+            <a:noAutofit/>
+          </a:bodyPr>
+          <a:lstStyle/>
+          <a:p>
+            <a:pPr lvl="0" marL="457200" indent="-228600">
+              <a:buFont typeface="Calibri"/>
+              <a:spcAft>
+                <a:spcPts val="1000"/>
+              </a:spcAft>
+              <a:buSzPct val="100000"/>
+              <a:buChar char="•"/>
+              <a:lnSpc>
+                <a:spcPts val="2200"/>
+              </a:lnSpc>
+            </a:pPr>
+            <a:r>
+              <a:rPr sz="2000" b="0">
+                <a:solidFill>
+                  <a:srgbClr val="333333"/>
+                </a:solidFill>
+                <a:latin typeface="Calibri"/>
+              </a:rPr>
+              <a:t>Implement longest-path SP packing</a:t>
+            </a:r>
+          </a:p>
+          <a:p>
+            <a:pPr lvl="0" marL="457200" indent="-228600">
+              <a:buFont typeface="Calibri"/>
+              <a:spcAft>
+                <a:spcPts val="1000"/>
+              </a:spcAft>
+              <a:buSzPct val="100000"/>
+              <a:buChar char="•"/>
+              <a:lnSpc>
+                <a:spcPts val="2200"/>
+              </a:lnSpc>
+            </a:pPr>
+            <a:r>
+              <a:rPr sz="2000" b="0">
+                <a:solidFill>
+                  <a:srgbClr val="333333"/>
+                </a:solidFill>
+                <a:latin typeface="Calibri"/>
+              </a:rPr>
+              <a:t>Assert pos and neg are the same five ids, and the golden pair packs legally</a:t>
+            </a:r>
+          </a:p>
+        </p:txBody>
+      </p:sp>
+      <p:sp>
+        <p:nvSpPr>
+          <p:cNvPr id="4" name="TextBox 3"/>
+          <p:cNvSpPr txBox="1"/>
+          <p:nvPr/>
+        </p:nvSpPr>
+        <p:spPr>
+          <a:xfrm>
+            <a:off x="548640" y="6355080"/>
+            <a:ext cx="11064240" cy="320040"/>
+          </a:xfrm>
+          <a:prstGeom prst="rect">
+            <a:avLst/>
+          </a:prstGeom>
+          <a:noFill/>
+        </p:spPr>
+        <p:txBody>
+          <a:bodyPr wrap="square">
+            <a:noAutofit/>
+          </a:bodyPr>
+          <a:lstStyle/>
+          <a:p>
+            <a:pPr algn="r">
+              <a:lnSpc>
+                <a:spcPts val="2200"/>
+              </a:lnSpc>
+              <a:defRPr sz="1000" b="0">
+                <a:solidFill>
+                  <a:srgbClr val="666666"/>
+                </a:solidFill>
+                <a:latin typeface="Calibri"/>
+              </a:defRPr>
+            </a:pPr>
+            <a:r>
+              <a:t>learn_floorplanning — 05 sequence pair</a:t>
+            </a:r>
+          </a:p>
+        </p:txBody>
+      </p:sp>
+    </p:spTree>
+  </p:cSld>
+  <p:clrMapOvr>
+    <a:masterClrMapping/>
+  </p:clrMapOvr>
+</p:sld>
+</file>
+
+<file path=ppt/slides/slide12.xml><?xml version="1.0" encoding="utf-8"?>
+<p:sld xmlns:a="http://schemas.openxmlformats.org/drawingml/2006/main" xmlns:p="http://schemas.openxmlformats.org/presentationml/2006/main" xmlns:r="http://schemas.openxmlformats.org/officeDocument/2006/relationships">
+  <p:cSld>
+    <p:spTree>
+      <p:nvGrpSpPr>
+        <p:cNvPr id="1" name=""/>
+        <p:cNvGrpSpPr/>
+        <p:nvPr/>
+      </p:nvGrpSpPr>
+      <p:grpSpPr/>
+      <p:sp>
+        <p:nvSpPr>
+          <p:cNvPr id="2" name="TextBox 1"/>
+          <p:cNvSpPr txBox="1"/>
+          <p:nvPr/>
+        </p:nvSpPr>
+        <p:spPr>
+          <a:xfrm>
+            <a:off x="548640" y="411480"/>
+            <a:ext cx="11064240" cy="777240"/>
+          </a:xfrm>
+          <a:prstGeom prst="rect">
+            <a:avLst/>
+          </a:prstGeom>
+          <a:noFill/>
+        </p:spPr>
+        <p:txBody>
+          <a:bodyPr wrap="square">
+            <a:noAutofit/>
+          </a:bodyPr>
+          <a:lstStyle/>
+          <a:p>
+            <a:pPr>
+              <a:lnSpc>
+                <a:spcPts val="2200"/>
+              </a:lnSpc>
+            </a:pPr>
+            <a:r>
+              <a:rPr sz="2800" b="1">
+                <a:solidFill>
+                  <a:srgbClr val="1A1A2E"/>
+                </a:solidFill>
+                <a:latin typeface="Calibri"/>
+              </a:rPr>
+              <a:t>Pitfalls</a:t>
+            </a:r>
+          </a:p>
+        </p:txBody>
+      </p:sp>
+      <p:sp>
+        <p:nvSpPr>
+          <p:cNvPr id="3" name="TextBox 2"/>
+          <p:cNvSpPr txBox="1"/>
+          <p:nvPr/>
+        </p:nvSpPr>
+        <p:spPr>
+          <a:xfrm>
+            <a:off x="548640" y="1234440"/>
+            <a:ext cx="11064240" cy="4937760"/>
+          </a:xfrm>
+          <a:prstGeom prst="rect">
+            <a:avLst/>
+          </a:prstGeom>
+          <a:noFill/>
+        </p:spPr>
+        <p:txBody>
+          <a:bodyPr wrap="square">
+            <a:noAutofit/>
+          </a:bodyPr>
+          <a:lstStyle/>
+          <a:p>
+            <a:pPr lvl="0" marL="457200" indent="-228600">
+              <a:buFont typeface="Calibri"/>
+              <a:spcAft>
+                <a:spcPts val="1000"/>
+              </a:spcAft>
+              <a:buSzPct val="100000"/>
+              <a:buChar char="•"/>
+              <a:lnSpc>
+                <a:spcPts val="2200"/>
+              </a:lnSpc>
+            </a:pPr>
+            <a:r>
+              <a:rPr sz="2000" b="0">
+                <a:solidFill>
+                  <a:srgbClr val="333333"/>
+                </a:solidFill>
+                <a:latin typeface="Calibri"/>
+              </a:rPr>
+              <a:t>Mismatched id sets between pos and neg</a:t>
+            </a:r>
+          </a:p>
+        </p:txBody>
+      </p:sp>
+      <p:sp>
+        <p:nvSpPr>
+          <p:cNvPr id="4" name="TextBox 3"/>
+          <p:cNvSpPr txBox="1"/>
+          <p:nvPr/>
+        </p:nvSpPr>
+        <p:spPr>
+          <a:xfrm>
+            <a:off x="548640" y="6355080"/>
+            <a:ext cx="11064240" cy="320040"/>
+          </a:xfrm>
+          <a:prstGeom prst="rect">
+            <a:avLst/>
+          </a:prstGeom>
+          <a:noFill/>
+        </p:spPr>
+        <p:txBody>
+          <a:bodyPr wrap="square">
+            <a:noAutofit/>
+          </a:bodyPr>
+          <a:lstStyle/>
+          <a:p>
+            <a:pPr algn="r">
+              <a:lnSpc>
+                <a:spcPts val="2200"/>
+              </a:lnSpc>
+              <a:defRPr sz="1000" b="0">
+                <a:solidFill>
+                  <a:srgbClr val="666666"/>
+                </a:solidFill>
+                <a:latin typeface="Calibri"/>
+              </a:defRPr>
+            </a:pPr>
+            <a:r>
+              <a:t>learn_floorplanning — 05 sequence pair</a:t>
+            </a:r>
+          </a:p>
+        </p:txBody>
+      </p:sp>
+    </p:spTree>
+  </p:cSld>
+  <p:clrMapOvr>
+    <a:masterClrMapping/>
+  </p:clrMapOvr>
+</p:sld>
+</file>
+
+<file path=ppt/slides/slide13.xml><?xml version="1.0" encoding="utf-8"?>
+<p:sld xmlns:a="http://schemas.openxmlformats.org/drawingml/2006/main" xmlns:p="http://schemas.openxmlformats.org/presentationml/2006/main" xmlns:r="http://schemas.openxmlformats.org/officeDocument/2006/relationships">
+  <p:cSld>
+    <p:spTree>
+      <p:nvGrpSpPr>
+        <p:cNvPr id="1" name=""/>
+        <p:cNvGrpSpPr/>
+        <p:nvPr/>
+      </p:nvGrpSpPr>
+      <p:grpSpPr/>
+      <p:sp>
+        <p:nvSpPr>
+          <p:cNvPr id="2" name="TextBox 1"/>
+          <p:cNvSpPr txBox="1"/>
+          <p:nvPr/>
+        </p:nvSpPr>
+        <p:spPr>
+          <a:xfrm>
+            <a:off x="548640" y="411480"/>
+            <a:ext cx="11064240" cy="777240"/>
+          </a:xfrm>
+          <a:prstGeom prst="rect">
+            <a:avLst/>
+          </a:prstGeom>
+          <a:noFill/>
+        </p:spPr>
+        <p:txBody>
+          <a:bodyPr wrap="square">
+            <a:noAutofit/>
+          </a:bodyPr>
+          <a:lstStyle/>
+          <a:p>
+            <a:pPr>
+              <a:lnSpc>
+                <a:spcPts val="2200"/>
+              </a:lnSpc>
+            </a:pPr>
+            <a:r>
+              <a:rPr sz="2800" b="1">
+                <a:solidFill>
+                  <a:srgbClr val="1A1A2E"/>
+                </a:solidFill>
+                <a:latin typeface="Calibri"/>
+              </a:rPr>
               <a:t>Your turn</a:t>
             </a:r>
           </a:p>
@@ -4474,45 +5078,21 @@
                 </a:solidFill>
                 <a:latin typeface="Calibri"/>
               </a:rPr>
-              <a:t>Two permutations encode geometry</a:t>
-            </a:r>
-          </a:p>
-        </p:txBody>
-      </p:sp>
-      <p:pic>
-        <p:nvPicPr>
-          <p:cNvPr id="3" name="Picture 2" descr="01-seqs.png"/>
-          <p:cNvPicPr>
-            <a:picLocks noChangeAspect="1"/>
-          </p:cNvPicPr>
-          <p:nvPr/>
-        </p:nvPicPr>
-        <p:blipFill>
-          <a:blip r:embed="rId2"/>
-          <a:stretch>
-            <a:fillRect/>
-          </a:stretch>
-        </p:blipFill>
-        <p:spPr>
-          <a:xfrm>
-            <a:off x="548640" y="1143000"/>
-            <a:ext cx="9424736" cy="4572000"/>
-          </a:xfrm>
-          <a:prstGeom prst="rect">
-            <a:avLst/>
-          </a:prstGeom>
-        </p:spPr>
-      </p:pic>
-      <p:sp>
-        <p:nvSpPr>
-          <p:cNvPr id="4" name="TextBox 3"/>
+              <a:t>Pseudocode</a:t>
+            </a:r>
+          </a:p>
+        </p:txBody>
+      </p:sp>
+      <p:sp>
+        <p:nvSpPr>
+          <p:cNvPr id="3" name="TextBox 2"/>
           <p:cNvSpPr txBox="1"/>
           <p:nvPr/>
         </p:nvSpPr>
         <p:spPr>
           <a:xfrm>
-            <a:off x="548640" y="5897880"/>
-            <a:ext cx="11064240" cy="411480"/>
+            <a:off x="548640" y="1234440"/>
+            <a:ext cx="11064240" cy="4937760"/>
           </a:xfrm>
           <a:prstGeom prst="rect">
             <a:avLst/>
@@ -4525,26 +5105,76 @@
           </a:bodyPr>
           <a:lstStyle/>
           <a:p>
-            <a:pPr>
+            <a:pPr lvl="0" marL="457200" indent="-228600">
+              <a:buFont typeface="Calibri"/>
+              <a:spcAft>
+                <a:spcPts val="1000"/>
+              </a:spcAft>
+              <a:buSzPct val="100000"/>
+              <a:buChar char="•"/>
               <a:lnSpc>
                 <a:spcPts val="2200"/>
               </a:lnSpc>
             </a:pPr>
             <a:r>
-              <a:rPr sz="1200" b="0">
+              <a:rPr sz="2000" b="0">
                 <a:solidFill>
                   <a:srgbClr val="333333"/>
                 </a:solidFill>
                 <a:latin typeface="Calibri"/>
               </a:rPr>
-              <a:t>Two permutations encode geometry</a:t>
-            </a:r>
-          </a:p>
-        </p:txBody>
-      </p:sp>
-      <p:sp>
-        <p:nvSpPr>
-          <p:cNvPr id="5" name="TextBox 4"/>
+              <a:t>Sequence-pair pseudocode turns two permutations into horizontal and vertical constraints</a:t>
+            </a:r>
+          </a:p>
+          <a:p>
+            <a:pPr lvl="0" marL="457200" indent="-228600">
+              <a:buFont typeface="Calibri"/>
+              <a:spcAft>
+                <a:spcPts val="1000"/>
+              </a:spcAft>
+              <a:buSzPct val="100000"/>
+              <a:buChar char="•"/>
+              <a:lnSpc>
+                <a:spcPts val="2200"/>
+              </a:lnSpc>
+            </a:pPr>
+            <a:r>
+              <a:rPr sz="2000" b="0">
+                <a:solidFill>
+                  <a:srgbClr val="333333"/>
+                </a:solidFill>
+                <a:latin typeface="Calibri"/>
+              </a:rPr>
+              <a:t>Open this module's examples file and find the Pseudocode section</a:t>
+            </a:r>
+          </a:p>
+          <a:p>
+            <a:pPr lvl="0" marL="457200" indent="-228600">
+              <a:buFont typeface="Calibri"/>
+              <a:spcAft>
+                <a:spcPts val="1000"/>
+              </a:spcAft>
+              <a:buSzPct val="100000"/>
+              <a:buChar char="•"/>
+              <a:lnSpc>
+                <a:spcPts val="2200"/>
+              </a:lnSpc>
+            </a:pPr>
+            <a:r>
+              <a:rPr sz="2000" b="0">
+                <a:solidFill>
+                  <a:srgbClr val="333333"/>
+                </a:solidFill>
+                <a:latin typeface="Calibri"/>
+              </a:rPr>
+              <a:t>That written sketch is what you implement on the implement track and what the browser</a:t>
+            </a:r>
+          </a:p>
+        </p:txBody>
+      </p:sp>
+      <p:sp>
+        <p:nvSpPr>
+          <p:cNvPr id="4" name="TextBox 3"/>
           <p:cNvSpPr txBox="1"/>
           <p:nvPr/>
         </p:nvSpPr>
@@ -4633,45 +5263,21 @@
                 </a:solidFill>
                 <a:latin typeface="Calibri"/>
               </a:rPr>
-              <a:t>Horizontal constraints set x</a:t>
-            </a:r>
-          </a:p>
-        </p:txBody>
-      </p:sp>
-      <p:pic>
-        <p:nvPicPr>
-          <p:cNvPr id="3" name="Picture 2" descr="02-h-rules.png"/>
-          <p:cNvPicPr>
-            <a:picLocks noChangeAspect="1"/>
-          </p:cNvPicPr>
-          <p:nvPr/>
-        </p:nvPicPr>
-        <p:blipFill>
-          <a:blip r:embed="rId2"/>
-          <a:stretch>
-            <a:fillRect/>
-          </a:stretch>
-        </p:blipFill>
-        <p:spPr>
-          <a:xfrm>
-            <a:off x="548640" y="1143000"/>
-            <a:ext cx="9424736" cy="4572000"/>
-          </a:xfrm>
-          <a:prstGeom prst="rect">
-            <a:avLst/>
-          </a:prstGeom>
-        </p:spPr>
-      </p:pic>
-      <p:sp>
-        <p:nvSpPr>
-          <p:cNvPr id="4" name="TextBox 3"/>
+              <a:t>Algorithm sketch</a:t>
+            </a:r>
+          </a:p>
+        </p:txBody>
+      </p:sp>
+      <p:sp>
+        <p:nvSpPr>
+          <p:cNvPr id="3" name="TextBox 2"/>
           <p:cNvSpPr txBox="1"/>
           <p:nvPr/>
         </p:nvSpPr>
         <p:spPr>
           <a:xfrm>
-            <a:off x="548640" y="5897880"/>
-            <a:ext cx="11064240" cy="411480"/>
+            <a:off x="548640" y="1234440"/>
+            <a:ext cx="11064240" cy="4937760"/>
           </a:xfrm>
           <a:prstGeom prst="rect">
             <a:avLst/>
@@ -4684,26 +5290,54 @@
           </a:bodyPr>
           <a:lstStyle/>
           <a:p>
-            <a:pPr>
+            <a:pPr lvl="0" marL="457200" indent="-228600">
+              <a:buFont typeface="Calibri"/>
+              <a:spcAft>
+                <a:spcPts val="1000"/>
+              </a:spcAft>
+              <a:buSzPct val="100000"/>
+              <a:buChar char="•"/>
               <a:lnSpc>
                 <a:spcPts val="2200"/>
               </a:lnSpc>
             </a:pPr>
             <a:r>
-              <a:rPr sz="1200" b="0">
+              <a:rPr sz="2000" b="0">
                 <a:solidFill>
                   <a:srgbClr val="333333"/>
                 </a:solidFill>
                 <a:latin typeface="Calibri"/>
               </a:rPr>
-              <a:t>Horizontal constraints set x</a:t>
-            </a:r>
-          </a:p>
-        </p:txBody>
-      </p:sp>
-      <p:sp>
-        <p:nvSpPr>
-          <p:cNvPr id="5" name="TextBox 4"/>
+              <a:t>Golden pos is A B C E D and neg is D A B C E</a:t>
+            </a:r>
+          </a:p>
+          <a:p>
+            <a:pPr lvl="0" marL="457200" indent="-228600">
+              <a:buFont typeface="Calibri"/>
+              <a:spcAft>
+                <a:spcPts val="1000"/>
+              </a:spcAft>
+              <a:buSzPct val="100000"/>
+              <a:buChar char="•"/>
+              <a:lnSpc>
+                <a:spcPts val="2200"/>
+              </a:lnSpc>
+            </a:pPr>
+            <a:r>
+              <a:rPr sz="2000" b="0">
+                <a:solidFill>
+                  <a:srgbClr val="333333"/>
+                </a:solidFill>
+                <a:latin typeface="Calibri"/>
+              </a:rPr>
+              <a:t>Evaluation must place all five modules legally with non-negative coordinates</a:t>
+            </a:r>
+          </a:p>
+        </p:txBody>
+      </p:sp>
+      <p:sp>
+        <p:nvSpPr>
+          <p:cNvPr id="4" name="TextBox 3"/>
           <p:cNvSpPr txBox="1"/>
           <p:nvPr/>
         </p:nvSpPr>
@@ -4792,50 +5426,28 @@
                 </a:solidFill>
                 <a:latin typeface="Calibri"/>
               </a:rPr>
-              <a:t>Vertical constraints set y</a:t>
-            </a:r>
-          </a:p>
-        </p:txBody>
-      </p:sp>
-      <p:pic>
-        <p:nvPicPr>
-          <p:cNvPr id="3" name="Picture 2" descr="03-v-rules.png"/>
-          <p:cNvPicPr>
-            <a:picLocks noChangeAspect="1"/>
-          </p:cNvPicPr>
+              <a:t>Algorithm sketch — try these</a:t>
+            </a:r>
+          </a:p>
+        </p:txBody>
+      </p:sp>
+      <p:sp>
+        <p:nvSpPr>
+          <p:cNvPr id="3" name="TextBox 2"/>
+          <p:cNvSpPr txBox="1"/>
           <p:nvPr/>
-        </p:nvPicPr>
-        <p:blipFill>
-          <a:blip r:embed="rId2"/>
-          <a:stretch>
-            <a:fillRect/>
-          </a:stretch>
-        </p:blipFill>
+        </p:nvSpPr>
         <p:spPr>
           <a:xfrm>
             <a:off x="548640" y="1143000"/>
-            <a:ext cx="9424736" cy="4572000"/>
+            <a:ext cx="11064240" cy="5029200"/>
           </a:xfrm>
           <a:prstGeom prst="rect">
             <a:avLst/>
           </a:prstGeom>
-        </p:spPr>
-      </p:pic>
-      <p:sp>
-        <p:nvSpPr>
-          <p:cNvPr id="4" name="TextBox 3"/>
-          <p:cNvSpPr txBox="1"/>
-          <p:nvPr/>
-        </p:nvSpPr>
-        <p:spPr>
-          <a:xfrm>
-            <a:off x="548640" y="5897880"/>
-            <a:ext cx="11064240" cy="411480"/>
-          </a:xfrm>
-          <a:prstGeom prst="rect">
-            <a:avLst/>
-          </a:prstGeom>
-          <a:noFill/>
+          <a:solidFill>
+            <a:srgbClr val="F4F4F4"/>
+          </a:solidFill>
         </p:spPr>
         <p:txBody>
           <a:bodyPr wrap="square">
@@ -4847,22 +5459,120 @@
               <a:lnSpc>
                 <a:spcPts val="2200"/>
               </a:lnSpc>
+              <a:spcAft>
+                <a:spcPts val="400"/>
+              </a:spcAft>
             </a:pPr>
             <a:r>
-              <a:rPr sz="1200" b="0">
+              <a:rPr sz="2000" b="0">
                 <a:solidFill>
                   <a:srgbClr val="333333"/>
                 </a:solidFill>
-                <a:latin typeface="Calibri"/>
+                <a:latin typeface="Consolas"/>
               </a:rPr>
-              <a:t>Vertical constraints set y</a:t>
-            </a:r>
-          </a:p>
-        </p:txBody>
-      </p:sp>
-      <p:sp>
-        <p:nvSpPr>
-          <p:cNvPr id="5" name="TextBox 4"/>
+              <a:t>INPUT: pos[], neg[] permutations of modules</a:t>
+            </a:r>
+          </a:p>
+          <a:p>
+            <a:pPr>
+              <a:lnSpc>
+                <a:spcPts val="2200"/>
+              </a:lnSpc>
+              <a:spcAft>
+                <a:spcPts val="400"/>
+              </a:spcAft>
+            </a:pPr>
+            <a:r>
+              <a:rPr sz="2000" b="0">
+                <a:solidFill>
+                  <a:srgbClr val="333333"/>
+                </a:solidFill>
+                <a:latin typeface="Consolas"/>
+              </a:rPr>
+              <a:t>OUTPUT: (x,y) via constraint longest paths</a:t>
+            </a:r>
+          </a:p>
+          <a:p>
+            <a:pPr>
+              <a:lnSpc>
+                <a:spcPts val="2200"/>
+              </a:lnSpc>
+              <a:spcAft>
+                <a:spcPts val="400"/>
+              </a:spcAft>
+            </a:pPr>
+            <a:r>
+              <a:rPr sz="2000" b="0">
+                <a:solidFill>
+                  <a:srgbClr val="333333"/>
+                </a:solidFill>
+                <a:latin typeface="Consolas"/>
+              </a:rPr>
+              <a:t>pos/neg order ⇒ horizontal &amp; vertical constraints</a:t>
+            </a:r>
+          </a:p>
+          <a:p>
+            <a:pPr>
+              <a:lnSpc>
+                <a:spcPts val="2200"/>
+              </a:lnSpc>
+              <a:spcAft>
+                <a:spcPts val="400"/>
+              </a:spcAft>
+            </a:pPr>
+            <a:r>
+              <a:rPr sz="2000" b="0">
+                <a:solidFill>
+                  <a:srgbClr val="333333"/>
+                </a:solidFill>
+                <a:latin typeface="Consolas"/>
+              </a:rPr>
+              <a:t>x ← longest path in H-graph; y ← V-graph</a:t>
+            </a:r>
+          </a:p>
+          <a:p>
+            <a:pPr>
+              <a:lnSpc>
+                <a:spcPts val="2200"/>
+              </a:lnSpc>
+              <a:spcAft>
+                <a:spcPts val="400"/>
+              </a:spcAft>
+            </a:pPr>
+            <a:r>
+              <a:rPr sz="2000" b="0">
+                <a:solidFill>
+                  <a:srgbClr val="333333"/>
+                </a:solidFill>
+                <a:latin typeface="Consolas"/>
+              </a:rPr>
+              <a:t>GOLDEN pos=A B C E D; neg=D A B C E</a:t>
+            </a:r>
+          </a:p>
+          <a:p>
+            <a:pPr>
+              <a:lnSpc>
+                <a:spcPts val="2200"/>
+              </a:lnSpc>
+              <a:spcAft>
+                <a:spcPts val="400"/>
+              </a:spcAft>
+            </a:pPr>
+            <a:r>
+              <a:rPr sz="2000" b="0">
+                <a:solidFill>
+                  <a:srgbClr val="333333"/>
+                </a:solidFill>
+                <a:latin typeface="Consolas"/>
+              </a:rPr>
+              <a:t>packs legally with non-negative coords</a:t>
+            </a:r>
+          </a:p>
+        </p:txBody>
+      </p:sp>
+      <p:sp>
+        <p:nvSpPr>
+          <p:cNvPr id="4" name="TextBox 3"/>
           <p:cNvSpPr txBox="1"/>
           <p:nvPr/>
         </p:nvSpPr>
@@ -4951,14 +5661,14 @@
                 </a:solidFill>
                 <a:latin typeface="Calibri"/>
               </a:rPr>
-              <a:t>Golden SP packs legally</a:t>
+              <a:t>Two permutations encode geometry</a:t>
             </a:r>
           </a:p>
         </p:txBody>
       </p:sp>
       <p:pic>
         <p:nvPicPr>
-          <p:cNvPr id="3" name="Picture 2" descr="04-legal.png"/>
+          <p:cNvPr id="3" name="Picture 2" descr="01-seqs.png"/>
           <p:cNvPicPr>
             <a:picLocks noChangeAspect="1"/>
           </p:cNvPicPr>
@@ -5014,7 +5724,7 @@
                 </a:solidFill>
                 <a:latin typeface="Calibri"/>
               </a:rPr>
-              <a:t>Golden SP packs legally</a:t>
+              <a:t>Two permutations encode geometry</a:t>
             </a:r>
           </a:p>
         </p:txBody>
@@ -5110,14 +5820,14 @@
                 </a:solidFill>
                 <a:latin typeface="Calibri"/>
               </a:rPr>
-              <a:t>SP neighbors are permutation moves</a:t>
+              <a:t>Horizontal constraints set x</a:t>
             </a:r>
           </a:p>
         </p:txBody>
       </p:sp>
       <p:pic>
         <p:nvPicPr>
-          <p:cNvPr id="3" name="Picture 2" descr="05-takeaway.png"/>
+          <p:cNvPr id="3" name="Picture 2" descr="02-h-rules.png"/>
           <p:cNvPicPr>
             <a:picLocks noChangeAspect="1"/>
           </p:cNvPicPr>
@@ -5173,7 +5883,7 @@
                 </a:solidFill>
                 <a:latin typeface="Calibri"/>
               </a:rPr>
-              <a:t>SP neighbors are permutation moves</a:t>
+              <a:t>Horizontal constraints set x</a:t>
             </a:r>
           </a:p>
         </p:txBody>
@@ -5269,21 +5979,45 @@
                 </a:solidFill>
                 <a:latin typeface="Calibri"/>
               </a:rPr>
-              <a:t>Browser lab track</a:t>
-            </a:r>
-          </a:p>
-        </p:txBody>
-      </p:sp>
-      <p:sp>
-        <p:nvSpPr>
-          <p:cNvPr id="3" name="TextBox 2"/>
+              <a:t>Vertical constraints set y</a:t>
+            </a:r>
+          </a:p>
+        </p:txBody>
+      </p:sp>
+      <p:pic>
+        <p:nvPicPr>
+          <p:cNvPr id="3" name="Picture 2" descr="03-v-rules.png"/>
+          <p:cNvPicPr>
+            <a:picLocks noChangeAspect="1"/>
+          </p:cNvPicPr>
+          <p:nvPr/>
+        </p:nvPicPr>
+        <p:blipFill>
+          <a:blip r:embed="rId2"/>
+          <a:stretch>
+            <a:fillRect/>
+          </a:stretch>
+        </p:blipFill>
+        <p:spPr>
+          <a:xfrm>
+            <a:off x="548640" y="1143000"/>
+            <a:ext cx="9424736" cy="4572000"/>
+          </a:xfrm>
+          <a:prstGeom prst="rect">
+            <a:avLst/>
+          </a:prstGeom>
+        </p:spPr>
+      </p:pic>
+      <p:sp>
+        <p:nvSpPr>
+          <p:cNvPr id="4" name="TextBox 3"/>
           <p:cNvSpPr txBox="1"/>
           <p:nvPr/>
         </p:nvSpPr>
         <p:spPr>
           <a:xfrm>
-            <a:off x="548640" y="1234440"/>
-            <a:ext cx="11064240" cy="4937760"/>
+            <a:off x="548640" y="5897880"/>
+            <a:ext cx="11064240" cy="411480"/>
           </a:xfrm>
           <a:prstGeom prst="rect">
             <a:avLst/>
@@ -5296,54 +6030,26 @@
           </a:bodyPr>
           <a:lstStyle/>
           <a:p>
-            <a:pPr lvl="0" marL="457200" indent="-228600">
-              <a:buFont typeface="Calibri"/>
-              <a:spcAft>
-                <a:spcPts val="1000"/>
-              </a:spcAft>
-              <a:buSzPct val="100000"/>
-              <a:buChar char="•"/>
+            <a:pPr>
               <a:lnSpc>
                 <a:spcPts val="2200"/>
               </a:lnSpc>
             </a:pPr>
             <a:r>
-              <a:rPr sz="2000" b="0">
+              <a:rPr sz="1200" b="0">
                 <a:solidFill>
                   <a:srgbClr val="333333"/>
                 </a:solidFill>
                 <a:latin typeface="Calibri"/>
               </a:rPr>
-              <a:t>Open sequence-pair and Pack sequence pair</a:t>
-            </a:r>
-          </a:p>
-          <a:p>
-            <a:pPr lvl="0" marL="457200" indent="-228600">
-              <a:buFont typeface="Calibri"/>
-              <a:spcAft>
-                <a:spcPts val="1000"/>
-              </a:spcAft>
-              <a:buSzPct val="100000"/>
-              <a:buChar char="•"/>
-              <a:lnSpc>
-                <a:spcPts val="2200"/>
-              </a:lnSpc>
-            </a:pPr>
-            <a:r>
-              <a:rPr sz="2000" b="0">
-                <a:solidFill>
-                  <a:srgbClr val="333333"/>
-                </a:solidFill>
-                <a:latin typeface="Calibri"/>
-              </a:rPr>
-              <a:t>Confirm five modules, non-negative coordinates</a:t>
-            </a:r>
-          </a:p>
-        </p:txBody>
-      </p:sp>
-      <p:sp>
-        <p:nvSpPr>
-          <p:cNvPr id="4" name="TextBox 3"/>
+              <a:t>Vertical constraints set y</a:t>
+            </a:r>
+          </a:p>
+        </p:txBody>
+      </p:sp>
+      <p:sp>
+        <p:nvSpPr>
+          <p:cNvPr id="5" name="TextBox 4"/>
           <p:cNvSpPr txBox="1"/>
           <p:nvPr/>
         </p:nvSpPr>
@@ -5432,21 +6138,45 @@
                 </a:solidFill>
                 <a:latin typeface="Calibri"/>
               </a:rPr>
-              <a:t>Implement track</a:t>
-            </a:r>
-          </a:p>
-        </p:txBody>
-      </p:sp>
-      <p:sp>
-        <p:nvSpPr>
-          <p:cNvPr id="3" name="TextBox 2"/>
+              <a:t>Golden SP packs legally</a:t>
+            </a:r>
+          </a:p>
+        </p:txBody>
+      </p:sp>
+      <p:pic>
+        <p:nvPicPr>
+          <p:cNvPr id="3" name="Picture 2" descr="04-legal.png"/>
+          <p:cNvPicPr>
+            <a:picLocks noChangeAspect="1"/>
+          </p:cNvPicPr>
+          <p:nvPr/>
+        </p:nvPicPr>
+        <p:blipFill>
+          <a:blip r:embed="rId2"/>
+          <a:stretch>
+            <a:fillRect/>
+          </a:stretch>
+        </p:blipFill>
+        <p:spPr>
+          <a:xfrm>
+            <a:off x="548640" y="1143000"/>
+            <a:ext cx="9424736" cy="4572000"/>
+          </a:xfrm>
+          <a:prstGeom prst="rect">
+            <a:avLst/>
+          </a:prstGeom>
+        </p:spPr>
+      </p:pic>
+      <p:sp>
+        <p:nvSpPr>
+          <p:cNvPr id="4" name="TextBox 3"/>
           <p:cNvSpPr txBox="1"/>
           <p:nvPr/>
         </p:nvSpPr>
         <p:spPr>
           <a:xfrm>
-            <a:off x="548640" y="1234440"/>
-            <a:ext cx="11064240" cy="4937760"/>
+            <a:off x="548640" y="5897880"/>
+            <a:ext cx="11064240" cy="411480"/>
           </a:xfrm>
           <a:prstGeom prst="rect">
             <a:avLst/>
@@ -5459,54 +6189,26 @@
           </a:bodyPr>
           <a:lstStyle/>
           <a:p>
-            <a:pPr lvl="0" marL="457200" indent="-228600">
-              <a:buFont typeface="Calibri"/>
-              <a:spcAft>
-                <a:spcPts val="1000"/>
-              </a:spcAft>
-              <a:buSzPct val="100000"/>
-              <a:buChar char="•"/>
+            <a:pPr>
               <a:lnSpc>
                 <a:spcPts val="2200"/>
               </a:lnSpc>
             </a:pPr>
             <a:r>
-              <a:rPr sz="2000" b="0">
+              <a:rPr sz="1200" b="0">
                 <a:solidFill>
                   <a:srgbClr val="333333"/>
                 </a:solidFill>
                 <a:latin typeface="Calibri"/>
               </a:rPr>
-              <a:t>Implement longest-path SP packing</a:t>
-            </a:r>
-          </a:p>
-          <a:p>
-            <a:pPr lvl="0" marL="457200" indent="-228600">
-              <a:buFont typeface="Calibri"/>
-              <a:spcAft>
-                <a:spcPts val="1000"/>
-              </a:spcAft>
-              <a:buSzPct val="100000"/>
-              <a:buChar char="•"/>
-              <a:lnSpc>
-                <a:spcPts val="2200"/>
-              </a:lnSpc>
-            </a:pPr>
-            <a:r>
-              <a:rPr sz="2000" b="0">
-                <a:solidFill>
-                  <a:srgbClr val="333333"/>
-                </a:solidFill>
-                <a:latin typeface="Calibri"/>
-              </a:rPr>
-              <a:t>Assert pos and neg are the same five ids, and the golden pair packs legally</a:t>
-            </a:r>
-          </a:p>
-        </p:txBody>
-      </p:sp>
-      <p:sp>
-        <p:nvSpPr>
-          <p:cNvPr id="4" name="TextBox 3"/>
+              <a:t>Golden SP packs legally</a:t>
+            </a:r>
+          </a:p>
+        </p:txBody>
+      </p:sp>
+      <p:sp>
+        <p:nvSpPr>
+          <p:cNvPr id="5" name="TextBox 4"/>
           <p:cNvSpPr txBox="1"/>
           <p:nvPr/>
         </p:nvSpPr>
@@ -5595,21 +6297,45 @@
                 </a:solidFill>
                 <a:latin typeface="Calibri"/>
               </a:rPr>
-              <a:t>Pitfalls</a:t>
-            </a:r>
-          </a:p>
-        </p:txBody>
-      </p:sp>
-      <p:sp>
-        <p:nvSpPr>
-          <p:cNvPr id="3" name="TextBox 2"/>
+              <a:t>SP neighbors are permutation moves</a:t>
+            </a:r>
+          </a:p>
+        </p:txBody>
+      </p:sp>
+      <p:pic>
+        <p:nvPicPr>
+          <p:cNvPr id="3" name="Picture 2" descr="05-takeaway.png"/>
+          <p:cNvPicPr>
+            <a:picLocks noChangeAspect="1"/>
+          </p:cNvPicPr>
+          <p:nvPr/>
+        </p:nvPicPr>
+        <p:blipFill>
+          <a:blip r:embed="rId2"/>
+          <a:stretch>
+            <a:fillRect/>
+          </a:stretch>
+        </p:blipFill>
+        <p:spPr>
+          <a:xfrm>
+            <a:off x="548640" y="1143000"/>
+            <a:ext cx="9424736" cy="4572000"/>
+          </a:xfrm>
+          <a:prstGeom prst="rect">
+            <a:avLst/>
+          </a:prstGeom>
+        </p:spPr>
+      </p:pic>
+      <p:sp>
+        <p:nvSpPr>
+          <p:cNvPr id="4" name="TextBox 3"/>
           <p:cNvSpPr txBox="1"/>
           <p:nvPr/>
         </p:nvSpPr>
         <p:spPr>
           <a:xfrm>
-            <a:off x="548640" y="1234440"/>
-            <a:ext cx="11064240" cy="4937760"/>
+            <a:off x="548640" y="5897880"/>
+            <a:ext cx="11064240" cy="411480"/>
           </a:xfrm>
           <a:prstGeom prst="rect">
             <a:avLst/>
@@ -5622,32 +6348,26 @@
           </a:bodyPr>
           <a:lstStyle/>
           <a:p>
-            <a:pPr lvl="0" marL="457200" indent="-228600">
-              <a:buFont typeface="Calibri"/>
-              <a:spcAft>
-                <a:spcPts val="1000"/>
-              </a:spcAft>
-              <a:buSzPct val="100000"/>
-              <a:buChar char="•"/>
+            <a:pPr>
               <a:lnSpc>
                 <a:spcPts val="2200"/>
               </a:lnSpc>
             </a:pPr>
             <a:r>
-              <a:rPr sz="2000" b="0">
+              <a:rPr sz="1200" b="0">
                 <a:solidFill>
                   <a:srgbClr val="333333"/>
                 </a:solidFill>
                 <a:latin typeface="Calibri"/>
               </a:rPr>
-              <a:t>Mismatched id sets between pos and neg</a:t>
-            </a:r>
-          </a:p>
-        </p:txBody>
-      </p:sp>
-      <p:sp>
-        <p:nvSpPr>
-          <p:cNvPr id="4" name="TextBox 3"/>
+              <a:t>SP neighbors are permutation moves</a:t>
+            </a:r>
+          </a:p>
+        </p:txBody>
+      </p:sp>
+      <p:sp>
+        <p:nvSpPr>
+          <p:cNvPr id="5" name="TextBox 4"/>
           <p:cNvSpPr txBox="1"/>
           <p:nvPr/>
         </p:nvSpPr>
